--- a/Slides.pptx
+++ b/Slides.pptx
@@ -2414,7 +2414,7 @@
                 <a:ea typeface="Cambria" pitchFamily="34" charset="-122"/>
                 <a:cs typeface="Cambria" pitchFamily="34" charset="-120"/>
               </a:rPr>
-              <a:t>What we predicted vs what we found</a:t>
+              <a:t>What we found </a:t>
             </a:r>
             <a:endParaRPr lang="en-US" sz="2500" dirty="0"/>
           </a:p>
@@ -4208,46 +4208,7 @@
                 <a:ea typeface="Calibri" pitchFamily="34" charset="-122"/>
                 <a:cs typeface="Calibri" pitchFamily="34" charset="-120"/>
               </a:rPr>
-              <a:t>Group 6  ·  CIS2601 - Internet Addiction across gender × Exercise groups</a:t>
-            </a:r>
-            <a:endParaRPr lang="en-US" sz="850" dirty="0"/>
-          </a:p>
-        </p:txBody>
-      </p:sp>
-      <p:sp>
-        <p:nvSpPr>
-          <p:cNvPr id="55" name="Text 52"/>
-          <p:cNvSpPr/>
-          <p:nvPr/>
-        </p:nvSpPr>
-        <p:spPr>
-          <a:xfrm>
-            <a:off x="10161727" y="6455664"/>
-            <a:ext cx="1463040" cy="274320"/>
-          </a:xfrm>
-          <a:prstGeom prst="rect">
-            <a:avLst/>
-          </a:prstGeom>
-          <a:noFill/>
-          <a:ln/>
-        </p:spPr>
-        <p:txBody>
-          <a:bodyPr wrap="square" lIns="0" tIns="0" rIns="0" bIns="0" rtlCol="0" anchor="ctr"/>
-          <a:lstStyle/>
-          <a:p>
-            <a:pPr marL="0" indent="0" algn="r">
-              <a:buNone/>
-            </a:pPr>
-            <a:r>
-              <a:rPr lang="en-US" sz="850" dirty="0">
-                <a:solidFill>
-                  <a:srgbClr val="6C7488"/>
-                </a:solidFill>
-                <a:latin typeface="Calibri" pitchFamily="34" charset="0"/>
-                <a:ea typeface="Calibri" pitchFamily="34" charset="-122"/>
-                <a:cs typeface="Calibri" pitchFamily="34" charset="-120"/>
-              </a:rPr>
-              <a:t>10  /  11</a:t>
+              <a:t>Group 2  ·  CIS2601 - Internet Addiction across gender × Exercise groups</a:t>
             </a:r>
             <a:endParaRPr lang="en-US" sz="850" dirty="0"/>
           </a:p>
@@ -4309,7 +4270,11 @@
           <a:bodyPr/>
           <a:lstStyle/>
           <a:p>
-            <a:endParaRPr lang="he-IL"/>
+            <a:endParaRPr lang="he-IL" dirty="0">
+              <a:highlight>
+                <a:srgbClr val="FFFF00"/>
+              </a:highlight>
+            </a:endParaRPr>
           </a:p>
         </p:txBody>
       </p:sp>
@@ -5474,7 +5439,7 @@
                 <a:ea typeface="Calibri" pitchFamily="34" charset="-122"/>
                 <a:cs typeface="Calibri" pitchFamily="34" charset="-120"/>
               </a:rPr>
-              <a:t>Group 6  ·  CIS2601 - Internet Addiction across gender × Exercise groups  ·  Association, not causation.</a:t>
+              <a:t>Group 2  ·  CIS2601 - Internet Addiction across gender × Exercise groups  ·  Association, not causation.</a:t>
             </a:r>
             <a:endParaRPr lang="en-US" sz="900" dirty="0"/>
           </a:p>
@@ -5687,7 +5652,6 @@
               </a:rPr>
               <a:t>Adolescent internet addiction is rising worldwide and travels with depression, poor sleep and suicidal ideation. If distress is what turns ordinary use into compulsive, out-of-control use, then the lever is mental-health support - not just screen-time limits.</a:t>
             </a:r>
-            <a:endParaRPr lang="en-US" sz="1300" dirty="0"/>
           </a:p>
         </p:txBody>
       </p:sp>
@@ -6586,8 +6550,8 @@
         </p:nvSpPr>
         <p:spPr>
           <a:xfrm>
-            <a:off x="566928" y="4681728"/>
-            <a:ext cx="11055096" cy="1325880"/>
+            <a:off x="566928" y="4919472"/>
+            <a:ext cx="10771632" cy="925436"/>
           </a:xfrm>
           <a:prstGeom prst="roundRect">
             <a:avLst>
@@ -6622,7 +6586,7 @@
         </p:nvSpPr>
         <p:spPr>
           <a:xfrm>
-            <a:off x="877824" y="4974336"/>
+            <a:off x="877824" y="5212080"/>
             <a:ext cx="512064" cy="512064"/>
           </a:xfrm>
           <a:prstGeom prst="ellipse">
@@ -6657,7 +6621,7 @@
         </p:blipFill>
         <p:spPr>
           <a:xfrm>
-            <a:off x="1021202" y="5117714"/>
+            <a:off x="1021202" y="5360276"/>
             <a:ext cx="225308" cy="225308"/>
           </a:xfrm>
           <a:prstGeom prst="rect">
@@ -6673,7 +6637,7 @@
         </p:nvSpPr>
         <p:spPr>
           <a:xfrm>
-            <a:off x="1591056" y="4919472"/>
+            <a:off x="1586484" y="5181460"/>
             <a:ext cx="9692640" cy="237744"/>
           </a:xfrm>
           <a:prstGeom prst="rect">
@@ -6725,24 +6689,35 @@
           <a:bodyPr wrap="square" lIns="0" tIns="0" rIns="0" bIns="0" rtlCol="0" anchor="ctr"/>
           <a:lstStyle/>
           <a:p>
-            <a:pPr marL="0" indent="0">
-              <a:lnSpc>
-                <a:spcPct val="110000"/>
-              </a:lnSpc>
-              <a:buNone/>
-            </a:pPr>
-            <a:r>
-              <a:rPr lang="en-US" sz="1200" dirty="0">
-                <a:solidFill>
-                  <a:srgbClr val="E4E9F4"/>
-                </a:solidFill>
-                <a:latin typeface="Calibri" pitchFamily="34" charset="0"/>
-                <a:ea typeface="Calibri" pitchFamily="34" charset="-122"/>
-                <a:cs typeface="Calibri" pitchFamily="34" charset="-120"/>
-              </a:rPr>
-              <a:t>These effects were each established separately. No prior study - and none using this Bangladeshi dataset - asks whether distress predicts perceived addiction differently across gender × exercise subgroups within one sample. We turn two documented main effects into a single, falsifiable interaction test, keeping subjective addiction (IAT) separate from raw exposure (hours).</a:t>
-            </a:r>
-            <a:endParaRPr lang="en-US" sz="1200" dirty="0"/>
+            <a:r>
+              <a:rPr lang="en-IL" sz="1200" i="1" dirty="0">
+                <a:solidFill>
+                  <a:schemeClr val="bg1"/>
+                </a:solidFill>
+              </a:rPr>
+              <a:t>We run the first single-sample interaction test of whether </a:t>
+            </a:r>
+            <a:r>
+              <a:rPr lang="en-IL" sz="1200" dirty="0">
+                <a:solidFill>
+                  <a:schemeClr val="bg1"/>
+                </a:solidFill>
+              </a:rPr>
+              <a:t> </a:t>
+            </a:r>
+            <a:r>
+              <a:rPr lang="en-IL" sz="1200" i="1" dirty="0">
+                <a:solidFill>
+                  <a:schemeClr val="bg1"/>
+                </a:solidFill>
+              </a:rPr>
+              <a:t>distress→addiction differs by gender × exercise, using perceived addiction rather than raw hours</a:t>
+            </a:r>
+            <a:endParaRPr lang="en-IL" sz="1200" dirty="0">
+              <a:solidFill>
+                <a:schemeClr val="bg1"/>
+              </a:solidFill>
+            </a:endParaRPr>
           </a:p>
         </p:txBody>
       </p:sp>
@@ -6779,7 +6754,7 @@
                 <a:ea typeface="Calibri" pitchFamily="34" charset="-122"/>
                 <a:cs typeface="Calibri" pitchFamily="34" charset="-120"/>
               </a:rPr>
-              <a:t>Group 6  ·  CIS2601 - Internet Addiction across gender × Exercise groups</a:t>
+              <a:t>Group 2  ·  CIS2601 - Internet Addiction across gender × Exercise groups</a:t>
             </a:r>
             <a:endParaRPr lang="en-US" sz="850" dirty="0"/>
           </a:p>
@@ -6787,40 +6762,52 @@
       </p:sp>
       <p:sp>
         <p:nvSpPr>
-          <p:cNvPr id="38" name="Text 30"/>
-          <p:cNvSpPr/>
-          <p:nvPr/>
-        </p:nvSpPr>
-        <p:spPr>
-          <a:xfrm>
-            <a:off x="10161727" y="6455664"/>
-            <a:ext cx="1463040" cy="274320"/>
-          </a:xfrm>
-          <a:prstGeom prst="rect">
-            <a:avLst/>
-          </a:prstGeom>
-          <a:noFill/>
-          <a:ln/>
-        </p:spPr>
-        <p:txBody>
-          <a:bodyPr wrap="square" lIns="0" tIns="0" rIns="0" bIns="0" rtlCol="0" anchor="ctr"/>
-          <a:lstStyle/>
-          <a:p>
-            <a:pPr marL="0" indent="0" algn="r">
-              <a:buNone/>
-            </a:pPr>
-            <a:r>
-              <a:rPr lang="en-US" sz="850" dirty="0">
-                <a:solidFill>
-                  <a:srgbClr val="6C7488"/>
-                </a:solidFill>
-                <a:latin typeface="Calibri" pitchFamily="34" charset="0"/>
-                <a:ea typeface="Calibri" pitchFamily="34" charset="-122"/>
-                <a:cs typeface="Calibri" pitchFamily="34" charset="-120"/>
-              </a:rPr>
-              <a:t>02  /  11</a:t>
-            </a:r>
-            <a:endParaRPr lang="en-US" sz="850" dirty="0"/>
+          <p:cNvPr id="39" name="TextBox 38">
+            <a:extLst>
+              <a:ext uri="{FF2B5EF4-FFF2-40B4-BE49-F238E27FC236}">
+                <a16:creationId xmlns:a16="http://schemas.microsoft.com/office/drawing/2014/main" id="{C15A8134-DB22-F327-966C-613C064E7E02}"/>
+              </a:ext>
+            </a:extLst>
+          </p:cNvPr>
+          <p:cNvSpPr txBox="1"/>
+          <p:nvPr/>
+        </p:nvSpPr>
+        <p:spPr>
+          <a:xfrm>
+            <a:off x="561594" y="4427588"/>
+            <a:ext cx="3496767" cy="261610"/>
+          </a:xfrm>
+          <a:prstGeom prst="rect">
+            <a:avLst/>
+          </a:prstGeom>
+          <a:noFill/>
+        </p:spPr>
+        <p:txBody>
+          <a:bodyPr wrap="square" rtlCol="0">
+            <a:spAutoFit/>
+          </a:bodyPr>
+          <a:lstStyle/>
+          <a:p>
+            <a:r>
+              <a:rPr lang="en-US" sz="1100" b="1" dirty="0">
+                <a:solidFill>
+                  <a:schemeClr val="bg2">
+                    <a:lumMod val="50000"/>
+                  </a:schemeClr>
+                </a:solidFill>
+                <a:latin typeface="Calibri" pitchFamily="34" charset="0"/>
+                <a:ea typeface="Calibri" pitchFamily="34" charset="-122"/>
+                <a:cs typeface="Calibri" pitchFamily="34" charset="-120"/>
+              </a:rPr>
+              <a:t>* ↔ stands for correlation</a:t>
+            </a:r>
+            <a:endParaRPr lang="en-IL" sz="1100" dirty="0">
+              <a:solidFill>
+                <a:schemeClr val="bg2">
+                  <a:lumMod val="50000"/>
+                </a:schemeClr>
+              </a:solidFill>
+            </a:endParaRPr>
           </a:p>
         </p:txBody>
       </p:sp>
@@ -7148,7 +7135,7 @@
         <p:spPr>
           <a:xfrm>
             <a:off x="1664208" y="1938528"/>
-            <a:ext cx="3749040" cy="1563624"/>
+            <a:ext cx="3977640" cy="1563624"/>
           </a:xfrm>
           <a:prstGeom prst="rect">
             <a:avLst/>
@@ -7175,7 +7162,7 @@
                 <a:ea typeface="Calibri" pitchFamily="34" charset="-122"/>
                 <a:cs typeface="Calibri" pitchFamily="34" charset="-120"/>
               </a:rPr>
-              <a:t>Within each of the four gender × exercise groups - girls who exercise, girls who don’t, boys who exercise, boys who don’t - do depression and loneliness </a:t>
+              <a:t>Within each of the four gender × exercise groups  do depression and loneliness </a:t>
             </a:r>
             <a:r>
               <a:rPr lang="en-US" sz="1200" dirty="0">
@@ -7196,7 +7183,121 @@
               </a:rPr>
               <a:t> (IAT)? And is that link stronger in some groups?</a:t>
             </a:r>
-            <a:endParaRPr lang="en-US" sz="1200" dirty="0"/>
+          </a:p>
+          <a:p>
+            <a:pPr marL="0" indent="0">
+              <a:lnSpc>
+                <a:spcPct val="108000"/>
+              </a:lnSpc>
+              <a:buNone/>
+            </a:pPr>
+            <a:r>
+              <a:rPr lang="en-US" sz="1200" dirty="0">
+                <a:solidFill>
+                  <a:schemeClr val="bg2">
+                    <a:lumMod val="50000"/>
+                  </a:schemeClr>
+                </a:solidFill>
+                <a:latin typeface="Calibri" pitchFamily="34" charset="0"/>
+                <a:cs typeface="Calibri" pitchFamily="34" charset="-120"/>
+              </a:rPr>
+              <a:t>The Groups:</a:t>
+            </a:r>
+          </a:p>
+          <a:p>
+            <a:pPr marL="171450" indent="-171450">
+              <a:lnSpc>
+                <a:spcPct val="108000"/>
+              </a:lnSpc>
+              <a:buFont typeface="Arial" panose="020B0604020202020204" pitchFamily="34" charset="0"/>
+              <a:buChar char="•"/>
+            </a:pPr>
+            <a:r>
+              <a:rPr lang="en-US" sz="1200" dirty="0">
+                <a:solidFill>
+                  <a:schemeClr val="bg2">
+                    <a:lumMod val="50000"/>
+                  </a:schemeClr>
+                </a:solidFill>
+                <a:latin typeface="Calibri" pitchFamily="34" charset="0"/>
+                <a:ea typeface="Calibri" pitchFamily="34" charset="-122"/>
+                <a:cs typeface="Calibri" pitchFamily="34" charset="-120"/>
+              </a:rPr>
+              <a:t>girls who exercise</a:t>
+            </a:r>
+          </a:p>
+          <a:p>
+            <a:pPr marL="171450" indent="-171450">
+              <a:lnSpc>
+                <a:spcPct val="108000"/>
+              </a:lnSpc>
+              <a:buFont typeface="Arial" panose="020B0604020202020204" pitchFamily="34" charset="0"/>
+              <a:buChar char="•"/>
+            </a:pPr>
+            <a:r>
+              <a:rPr lang="en-US" sz="1200" dirty="0">
+                <a:solidFill>
+                  <a:schemeClr val="bg2">
+                    <a:lumMod val="50000"/>
+                  </a:schemeClr>
+                </a:solidFill>
+                <a:latin typeface="Calibri" pitchFamily="34" charset="0"/>
+                <a:ea typeface="Calibri" pitchFamily="34" charset="-122"/>
+                <a:cs typeface="Calibri" pitchFamily="34" charset="-120"/>
+              </a:rPr>
+              <a:t>girls who don’t </a:t>
+            </a:r>
+          </a:p>
+          <a:p>
+            <a:pPr marL="171450" indent="-171450">
+              <a:lnSpc>
+                <a:spcPct val="108000"/>
+              </a:lnSpc>
+              <a:buFont typeface="Arial" panose="020B0604020202020204" pitchFamily="34" charset="0"/>
+              <a:buChar char="•"/>
+            </a:pPr>
+            <a:r>
+              <a:rPr lang="en-US" sz="1200" dirty="0">
+                <a:solidFill>
+                  <a:schemeClr val="bg2">
+                    <a:lumMod val="50000"/>
+                  </a:schemeClr>
+                </a:solidFill>
+                <a:latin typeface="Calibri" pitchFamily="34" charset="0"/>
+                <a:ea typeface="Calibri" pitchFamily="34" charset="-122"/>
+                <a:cs typeface="Calibri" pitchFamily="34" charset="-120"/>
+              </a:rPr>
+              <a:t>boys who exercise </a:t>
+            </a:r>
+          </a:p>
+          <a:p>
+            <a:pPr marL="171450" indent="-171450">
+              <a:lnSpc>
+                <a:spcPct val="108000"/>
+              </a:lnSpc>
+              <a:buFont typeface="Arial" panose="020B0604020202020204" pitchFamily="34" charset="0"/>
+              <a:buChar char="•"/>
+            </a:pPr>
+            <a:r>
+              <a:rPr lang="en-US" sz="1200" dirty="0">
+                <a:solidFill>
+                  <a:schemeClr val="bg2">
+                    <a:lumMod val="50000"/>
+                  </a:schemeClr>
+                </a:solidFill>
+                <a:latin typeface="Calibri" pitchFamily="34" charset="0"/>
+                <a:ea typeface="Calibri" pitchFamily="34" charset="-122"/>
+                <a:cs typeface="Calibri" pitchFamily="34" charset="-120"/>
+              </a:rPr>
+              <a:t>boys who don’t </a:t>
+            </a:r>
+            <a:endParaRPr lang="en-US" sz="1200" dirty="0">
+              <a:solidFill>
+                <a:schemeClr val="bg2">
+                  <a:lumMod val="50000"/>
+                </a:schemeClr>
+              </a:solidFill>
+            </a:endParaRPr>
           </a:p>
         </p:txBody>
       </p:sp>
@@ -7355,7 +7456,7 @@
         <p:spPr>
           <a:xfrm>
             <a:off x="1664208" y="4507992"/>
-            <a:ext cx="3749040" cy="923544"/>
+            <a:ext cx="3749040" cy="1124712"/>
           </a:xfrm>
           <a:prstGeom prst="rect">
             <a:avLst/>
@@ -7384,6 +7485,50 @@
               </a:rPr>
               <a:t>Given a student’s distress and group, can we forecast the chance they are internet-addicted (IAT ≥ 31, the Young cutoff)?</a:t>
             </a:r>
+          </a:p>
+          <a:p>
+            <a:pPr marL="0" indent="0">
+              <a:lnSpc>
+                <a:spcPct val="108000"/>
+              </a:lnSpc>
+              <a:buNone/>
+            </a:pPr>
+            <a:endParaRPr lang="en-US" sz="1200" dirty="0">
+              <a:solidFill>
+                <a:srgbClr val="2C3247"/>
+              </a:solidFill>
+              <a:latin typeface="Calibri" pitchFamily="34" charset="0"/>
+              <a:cs typeface="Calibri" pitchFamily="34" charset="-120"/>
+            </a:endParaRPr>
+          </a:p>
+          <a:p>
+            <a:pPr>
+              <a:lnSpc>
+                <a:spcPct val="108000"/>
+              </a:lnSpc>
+            </a:pPr>
+            <a:r>
+              <a:rPr lang="en-US" sz="1200" dirty="0">
+                <a:solidFill>
+                  <a:srgbClr val="2C3247"/>
+                </a:solidFill>
+                <a:latin typeface="Calibri" pitchFamily="34" charset="0"/>
+                <a:cs typeface="Calibri" pitchFamily="34" charset="-120"/>
+              </a:rPr>
+              <a:t>Depression </a:t>
+            </a:r>
+            <a:r>
+              <a:rPr lang="en-IL" sz="1050" dirty="0"/>
+              <a:t>→ P(IAT)</a:t>
+            </a:r>
+          </a:p>
+          <a:p>
+            <a:pPr marL="0" indent="0">
+              <a:lnSpc>
+                <a:spcPct val="108000"/>
+              </a:lnSpc>
+              <a:buNone/>
+            </a:pPr>
             <a:endParaRPr lang="en-US" sz="1200" dirty="0"/>
           </a:p>
         </p:txBody>
@@ -8401,46 +8546,7 @@
                 <a:ea typeface="Calibri" pitchFamily="34" charset="-122"/>
                 <a:cs typeface="Calibri" pitchFamily="34" charset="-120"/>
               </a:rPr>
-              <a:t>Group 6  ·  CIS2601 - Internet Addiction across gender × Exercise groups</a:t>
-            </a:r>
-            <a:endParaRPr lang="en-US" sz="850" dirty="0"/>
-          </a:p>
-        </p:txBody>
-      </p:sp>
-      <p:sp>
-        <p:nvSpPr>
-          <p:cNvPr id="45" name="Text 41"/>
-          <p:cNvSpPr/>
-          <p:nvPr/>
-        </p:nvSpPr>
-        <p:spPr>
-          <a:xfrm>
-            <a:off x="10161727" y="6455664"/>
-            <a:ext cx="1463040" cy="274320"/>
-          </a:xfrm>
-          <a:prstGeom prst="rect">
-            <a:avLst/>
-          </a:prstGeom>
-          <a:noFill/>
-          <a:ln/>
-        </p:spPr>
-        <p:txBody>
-          <a:bodyPr wrap="square" lIns="0" tIns="0" rIns="0" bIns="0" rtlCol="0" anchor="ctr"/>
-          <a:lstStyle/>
-          <a:p>
-            <a:pPr marL="0" indent="0" algn="r">
-              <a:buNone/>
-            </a:pPr>
-            <a:r>
-              <a:rPr lang="en-US" sz="850" dirty="0">
-                <a:solidFill>
-                  <a:srgbClr val="6C7488"/>
-                </a:solidFill>
-                <a:latin typeface="Calibri" pitchFamily="34" charset="0"/>
-                <a:ea typeface="Calibri" pitchFamily="34" charset="-122"/>
-                <a:cs typeface="Calibri" pitchFamily="34" charset="-120"/>
-              </a:rPr>
-              <a:t>03  /  11</a:t>
+              <a:t>Group 2  ·  CIS2601 - Internet Addiction across gender × Exercise groups</a:t>
             </a:r>
             <a:endParaRPr lang="en-US" sz="850" dirty="0"/>
           </a:p>
@@ -9728,46 +9834,7 @@
                 <a:ea typeface="Calibri" pitchFamily="34" charset="-122"/>
                 <a:cs typeface="Calibri" pitchFamily="34" charset="-120"/>
               </a:rPr>
-              <a:t>Group 6  ·  CIS2601 - Internet Addiction across gender × Exercise groups</a:t>
-            </a:r>
-            <a:endParaRPr lang="en-US" sz="850" dirty="0"/>
-          </a:p>
-        </p:txBody>
-      </p:sp>
-      <p:sp>
-        <p:nvSpPr>
-          <p:cNvPr id="38" name="Text 30"/>
-          <p:cNvSpPr/>
-          <p:nvPr/>
-        </p:nvSpPr>
-        <p:spPr>
-          <a:xfrm>
-            <a:off x="10161727" y="6455664"/>
-            <a:ext cx="1463040" cy="274320"/>
-          </a:xfrm>
-          <a:prstGeom prst="rect">
-            <a:avLst/>
-          </a:prstGeom>
-          <a:noFill/>
-          <a:ln/>
-        </p:spPr>
-        <p:txBody>
-          <a:bodyPr wrap="square" lIns="0" tIns="0" rIns="0" bIns="0" rtlCol="0" anchor="ctr"/>
-          <a:lstStyle/>
-          <a:p>
-            <a:pPr marL="0" indent="0" algn="r">
-              <a:buNone/>
-            </a:pPr>
-            <a:r>
-              <a:rPr lang="en-US" sz="850" dirty="0">
-                <a:solidFill>
-                  <a:srgbClr val="6C7488"/>
-                </a:solidFill>
-                <a:latin typeface="Calibri" pitchFamily="34" charset="0"/>
-                <a:ea typeface="Calibri" pitchFamily="34" charset="-122"/>
-                <a:cs typeface="Calibri" pitchFamily="34" charset="-120"/>
-              </a:rPr>
-              <a:t>04  /  11</a:t>
+              <a:t>Group 2  ·  CIS2601 - Internet Addiction across gender × Exercise groups</a:t>
             </a:r>
             <a:endParaRPr lang="en-US" sz="850" dirty="0"/>
           </a:p>
@@ -10967,46 +11034,7 @@
                 <a:ea typeface="Calibri" pitchFamily="34" charset="-122"/>
                 <a:cs typeface="Calibri" pitchFamily="34" charset="-120"/>
               </a:rPr>
-              <a:t>Group 6  ·  CIS2601 - Internet Addiction across gender × Exercise groups</a:t>
-            </a:r>
-            <a:endParaRPr lang="en-US" sz="850" dirty="0"/>
-          </a:p>
-        </p:txBody>
-      </p:sp>
-      <p:sp>
-        <p:nvSpPr>
-          <p:cNvPr id="32" name="Text 26"/>
-          <p:cNvSpPr/>
-          <p:nvPr/>
-        </p:nvSpPr>
-        <p:spPr>
-          <a:xfrm>
-            <a:off x="10161727" y="6455664"/>
-            <a:ext cx="1463040" cy="274320"/>
-          </a:xfrm>
-          <a:prstGeom prst="rect">
-            <a:avLst/>
-          </a:prstGeom>
-          <a:noFill/>
-          <a:ln/>
-        </p:spPr>
-        <p:txBody>
-          <a:bodyPr wrap="square" lIns="0" tIns="0" rIns="0" bIns="0" rtlCol="0" anchor="ctr"/>
-          <a:lstStyle/>
-          <a:p>
-            <a:pPr marL="0" indent="0" algn="r">
-              <a:buNone/>
-            </a:pPr>
-            <a:r>
-              <a:rPr lang="en-US" sz="850" dirty="0">
-                <a:solidFill>
-                  <a:srgbClr val="6C7488"/>
-                </a:solidFill>
-                <a:latin typeface="Calibri" pitchFamily="34" charset="0"/>
-                <a:ea typeface="Calibri" pitchFamily="34" charset="-122"/>
-                <a:cs typeface="Calibri" pitchFamily="34" charset="-120"/>
-              </a:rPr>
-              <a:t>05  /  11</a:t>
+              <a:t>Group 2  ·  CIS2601 - Internet Addiction across gender × Exercise groups</a:t>
             </a:r>
             <a:endParaRPr lang="en-US" sz="850" dirty="0"/>
           </a:p>
@@ -11728,46 +11756,7 @@
                 <a:ea typeface="Calibri" pitchFamily="34" charset="-122"/>
                 <a:cs typeface="Calibri" pitchFamily="34" charset="-120"/>
               </a:rPr>
-              <a:t>Group 6  ·  CIS2601 - Internet Addiction across gender × Exercise groups</a:t>
-            </a:r>
-            <a:endParaRPr lang="en-US" sz="850" dirty="0"/>
-          </a:p>
-        </p:txBody>
-      </p:sp>
-      <p:sp>
-        <p:nvSpPr>
-          <p:cNvPr id="21" name="Text 16"/>
-          <p:cNvSpPr/>
-          <p:nvPr/>
-        </p:nvSpPr>
-        <p:spPr>
-          <a:xfrm>
-            <a:off x="10161727" y="6455664"/>
-            <a:ext cx="1463040" cy="274320"/>
-          </a:xfrm>
-          <a:prstGeom prst="rect">
-            <a:avLst/>
-          </a:prstGeom>
-          <a:noFill/>
-          <a:ln/>
-        </p:spPr>
-        <p:txBody>
-          <a:bodyPr wrap="square" lIns="0" tIns="0" rIns="0" bIns="0" rtlCol="0" anchor="ctr"/>
-          <a:lstStyle/>
-          <a:p>
-            <a:pPr marL="0" indent="0" algn="r">
-              <a:buNone/>
-            </a:pPr>
-            <a:r>
-              <a:rPr lang="en-US" sz="850" dirty="0">
-                <a:solidFill>
-                  <a:srgbClr val="6C7488"/>
-                </a:solidFill>
-                <a:latin typeface="Calibri" pitchFamily="34" charset="0"/>
-                <a:ea typeface="Calibri" pitchFamily="34" charset="-122"/>
-                <a:cs typeface="Calibri" pitchFamily="34" charset="-120"/>
-              </a:rPr>
-              <a:t>06  /  11</a:t>
+              <a:t>Group 2  ·  CIS2601 - Internet Addiction across gender × Exercise groups</a:t>
             </a:r>
             <a:endParaRPr lang="en-US" sz="850" dirty="0"/>
           </a:p>
@@ -11782,7 +11771,7 @@
 </file>
 
 <file path=ppt/slides/slide7.xml><?xml version="1.0" encoding="utf-8"?>
-<p:sld xmlns:a="http://schemas.openxmlformats.org/drawingml/2006/main" xmlns:r="http://schemas.openxmlformats.org/officeDocument/2006/relationships" xmlns:p="http://schemas.openxmlformats.org/presentationml/2006/main">
+<p:sld xmlns:a="http://schemas.openxmlformats.org/drawingml/2006/main" xmlns:r="http://schemas.openxmlformats.org/officeDocument/2006/relationships" xmlns:p="http://schemas.openxmlformats.org/presentationml/2006/main" show="0">
   <p:cSld name="Slide 7">
     <p:bg>
       <p:bgPr>
@@ -11983,13 +11972,13 @@
       </p:sp>
       <p:sp>
         <p:nvSpPr>
-          <p:cNvPr id="7" name="Shape 4"/>
-          <p:cNvSpPr/>
-          <p:nvPr/>
-        </p:nvSpPr>
-        <p:spPr>
-          <a:xfrm>
-            <a:off x="566928" y="1828800"/>
+          <p:cNvPr id="14" name="Shape 11"/>
+          <p:cNvSpPr/>
+          <p:nvPr/>
+        </p:nvSpPr>
+        <p:spPr>
+          <a:xfrm>
+            <a:off x="6240780" y="1828800"/>
             <a:ext cx="5381244" cy="1993392"/>
           </a:xfrm>
           <a:prstGeom prst="roundRect">
@@ -12024,20 +12013,20 @@
       </p:sp>
       <p:sp>
         <p:nvSpPr>
-          <p:cNvPr id="8" name="Shape 5"/>
-          <p:cNvSpPr/>
-          <p:nvPr/>
-        </p:nvSpPr>
-        <p:spPr>
-          <a:xfrm>
-            <a:off x="822960" y="2084832"/>
+          <p:cNvPr id="15" name="Shape 12"/>
+          <p:cNvSpPr/>
+          <p:nvPr/>
+        </p:nvSpPr>
+        <p:spPr>
+          <a:xfrm>
+            <a:off x="6496812" y="2084832"/>
             <a:ext cx="548640" cy="548640"/>
           </a:xfrm>
           <a:prstGeom prst="ellipse">
             <a:avLst/>
           </a:prstGeom>
           <a:solidFill>
-            <a:srgbClr val="DA5740"/>
+            <a:srgbClr val="3B79B0"/>
           </a:solidFill>
           <a:ln/>
           <a:effectLst>
@@ -12058,13 +12047,13 @@
       </p:sp>
       <p:sp>
         <p:nvSpPr>
-          <p:cNvPr id="9" name="Text 6"/>
-          <p:cNvSpPr/>
-          <p:nvPr/>
-        </p:nvSpPr>
-        <p:spPr>
-          <a:xfrm>
-            <a:off x="822960" y="2084832"/>
+          <p:cNvPr id="16" name="Text 13"/>
+          <p:cNvSpPr/>
+          <p:nvPr/>
+        </p:nvSpPr>
+        <p:spPr>
+          <a:xfrm>
+            <a:off x="6496812" y="2084832"/>
             <a:ext cx="548640" cy="548640"/>
           </a:xfrm>
           <a:prstGeom prst="rect">
@@ -12089,7 +12078,7 @@
                 <a:ea typeface="Cambria" pitchFamily="34" charset="-122"/>
                 <a:cs typeface="Cambria" pitchFamily="34" charset="-120"/>
               </a:rPr>
-              <a:t>1</a:t>
+              <a:t>2</a:t>
             </a:r>
             <a:endParaRPr lang="en-US" sz="2000" dirty="0"/>
           </a:p>
@@ -12097,13 +12086,13 @@
       </p:sp>
       <p:sp>
         <p:nvSpPr>
-          <p:cNvPr id="10" name="Text 7"/>
-          <p:cNvSpPr/>
-          <p:nvPr/>
-        </p:nvSpPr>
-        <p:spPr>
-          <a:xfrm>
-            <a:off x="1517904" y="2084832"/>
+          <p:cNvPr id="17" name="Text 14"/>
+          <p:cNvSpPr/>
+          <p:nvPr/>
+        </p:nvSpPr>
+        <p:spPr>
+          <a:xfrm>
+            <a:off x="7191756" y="2084832"/>
             <a:ext cx="4192524" cy="566928"/>
           </a:xfrm>
           <a:prstGeom prst="rect">
@@ -12128,7 +12117,7 @@
                 <a:ea typeface="Calibri" pitchFamily="34" charset="-122"/>
                 <a:cs typeface="Calibri" pitchFamily="34" charset="-120"/>
               </a:rPr>
-              <a:t>Four linear regressions - one per group</a:t>
+              <a:t>Pooled interaction model</a:t>
             </a:r>
             <a:endParaRPr lang="en-US" sz="1450" dirty="0"/>
           </a:p>
@@ -12136,13 +12125,13 @@
       </p:sp>
       <p:sp>
         <p:nvSpPr>
-          <p:cNvPr id="11" name="Shape 8"/>
-          <p:cNvSpPr/>
-          <p:nvPr/>
-        </p:nvSpPr>
-        <p:spPr>
-          <a:xfrm>
-            <a:off x="841248" y="2724912"/>
+          <p:cNvPr id="18" name="Shape 15"/>
+          <p:cNvSpPr/>
+          <p:nvPr/>
+        </p:nvSpPr>
+        <p:spPr>
+          <a:xfrm>
+            <a:off x="6515100" y="2724912"/>
             <a:ext cx="4832604" cy="384048"/>
           </a:xfrm>
           <a:prstGeom prst="roundRect">
@@ -12151,7 +12140,7 @@
             </a:avLst>
           </a:prstGeom>
           <a:solidFill>
-            <a:srgbClr val="FAEAE6"/>
+            <a:srgbClr val="EAF1F8"/>
           </a:solidFill>
           <a:ln/>
         </p:spPr>
@@ -12165,13 +12154,13 @@
       </p:sp>
       <p:sp>
         <p:nvSpPr>
-          <p:cNvPr id="12" name="Text 9"/>
-          <p:cNvSpPr/>
-          <p:nvPr/>
-        </p:nvSpPr>
-        <p:spPr>
-          <a:xfrm>
-            <a:off x="969264" y="2724912"/>
+          <p:cNvPr id="19" name="Text 16"/>
+          <p:cNvSpPr/>
+          <p:nvPr/>
+        </p:nvSpPr>
+        <p:spPr>
+          <a:xfrm>
+            <a:off x="6643116" y="2724912"/>
             <a:ext cx="4631436" cy="384048"/>
           </a:xfrm>
           <a:prstGeom prst="rect">
@@ -12190,13 +12179,13 @@
             <a:r>
               <a:rPr lang="en-US" sz="1020" dirty="0">
                 <a:solidFill>
-                  <a:srgbClr val="DA5740"/>
+                  <a:srgbClr val="3B79B0"/>
                 </a:solidFill>
                 <a:latin typeface="Consolas" pitchFamily="34" charset="0"/>
                 <a:ea typeface="Consolas" pitchFamily="34" charset="-122"/>
                 <a:cs typeface="Consolas" pitchFamily="34" charset="-120"/>
               </a:rPr>
-              <a:t>TotalIA ~ depression + loneliness + age + bullied</a:t>
+              <a:t>Do the distress slopes differ across groups?</a:t>
             </a:r>
             <a:endParaRPr lang="en-US" sz="1020" dirty="0"/>
           </a:p>
@@ -12204,13 +12193,13 @@
       </p:sp>
       <p:sp>
         <p:nvSpPr>
-          <p:cNvPr id="13" name="Text 10"/>
-          <p:cNvSpPr/>
-          <p:nvPr/>
-        </p:nvSpPr>
-        <p:spPr>
-          <a:xfrm>
-            <a:off x="841248" y="3163824"/>
+          <p:cNvPr id="20" name="Text 17"/>
+          <p:cNvSpPr/>
+          <p:nvPr/>
+        </p:nvSpPr>
+        <p:spPr>
+          <a:xfrm>
+            <a:off x="6515100" y="3163824"/>
             <a:ext cx="4850892" cy="585216"/>
           </a:xfrm>
           <a:prstGeom prst="rect">
@@ -12238,7 +12227,7 @@
                 <a:ea typeface="Calibri" pitchFamily="34" charset="-122"/>
                 <a:cs typeface="Calibri" pitchFamily="34" charset="-120"/>
               </a:rPr>
-              <a:t>Estimates the distress slope inside each gender × exercise subgroup, holding the group fixed by stratification.</a:t>
+              <a:t>The falsifiable test of H2 - whether exercise buffers the distress→addiction link, and whether that differs by gender.</a:t>
             </a:r>
             <a:endParaRPr lang="en-US" sz="1100" dirty="0"/>
           </a:p>
@@ -12246,13 +12235,13 @@
       </p:sp>
       <p:sp>
         <p:nvSpPr>
-          <p:cNvPr id="14" name="Shape 11"/>
-          <p:cNvSpPr/>
-          <p:nvPr/>
-        </p:nvSpPr>
-        <p:spPr>
-          <a:xfrm>
-            <a:off x="6240780" y="1828800"/>
+          <p:cNvPr id="21" name="Shape 18"/>
+          <p:cNvSpPr/>
+          <p:nvPr/>
+        </p:nvSpPr>
+        <p:spPr>
+          <a:xfrm>
+            <a:off x="566928" y="4114800"/>
             <a:ext cx="5381244" cy="1993392"/>
           </a:xfrm>
           <a:prstGeom prst="roundRect">
@@ -12287,20 +12276,20 @@
       </p:sp>
       <p:sp>
         <p:nvSpPr>
-          <p:cNvPr id="15" name="Shape 12"/>
-          <p:cNvSpPr/>
-          <p:nvPr/>
-        </p:nvSpPr>
-        <p:spPr>
-          <a:xfrm>
-            <a:off x="6496812" y="2084832"/>
+          <p:cNvPr id="22" name="Shape 19"/>
+          <p:cNvSpPr/>
+          <p:nvPr/>
+        </p:nvSpPr>
+        <p:spPr>
+          <a:xfrm>
+            <a:off x="822960" y="4370832"/>
             <a:ext cx="548640" cy="548640"/>
           </a:xfrm>
           <a:prstGeom prst="ellipse">
             <a:avLst/>
           </a:prstGeom>
           <a:solidFill>
-            <a:srgbClr val="3B79B0"/>
+            <a:srgbClr val="8A5BB0"/>
           </a:solidFill>
           <a:ln/>
           <a:effectLst>
@@ -12321,13 +12310,13 @@
       </p:sp>
       <p:sp>
         <p:nvSpPr>
-          <p:cNvPr id="16" name="Text 13"/>
-          <p:cNvSpPr/>
-          <p:nvPr/>
-        </p:nvSpPr>
-        <p:spPr>
-          <a:xfrm>
-            <a:off x="6496812" y="2084832"/>
+          <p:cNvPr id="23" name="Text 20"/>
+          <p:cNvSpPr/>
+          <p:nvPr/>
+        </p:nvSpPr>
+        <p:spPr>
+          <a:xfrm>
+            <a:off x="822960" y="4370832"/>
             <a:ext cx="548640" cy="548640"/>
           </a:xfrm>
           <a:prstGeom prst="rect">
@@ -12352,7 +12341,7 @@
                 <a:ea typeface="Cambria" pitchFamily="34" charset="-122"/>
                 <a:cs typeface="Cambria" pitchFamily="34" charset="-120"/>
               </a:rPr>
-              <a:t>2</a:t>
+              <a:t>3</a:t>
             </a:r>
             <a:endParaRPr lang="en-US" sz="2000" dirty="0"/>
           </a:p>
@@ -12360,13 +12349,13 @@
       </p:sp>
       <p:sp>
         <p:nvSpPr>
-          <p:cNvPr id="17" name="Text 14"/>
-          <p:cNvSpPr/>
-          <p:nvPr/>
-        </p:nvSpPr>
-        <p:spPr>
-          <a:xfrm>
-            <a:off x="7191756" y="2084832"/>
+          <p:cNvPr id="24" name="Text 21"/>
+          <p:cNvSpPr/>
+          <p:nvPr/>
+        </p:nvSpPr>
+        <p:spPr>
+          <a:xfrm>
+            <a:off x="1517904" y="4370832"/>
             <a:ext cx="4192524" cy="566928"/>
           </a:xfrm>
           <a:prstGeom prst="rect">
@@ -12391,7 +12380,7 @@
                 <a:ea typeface="Calibri" pitchFamily="34" charset="-122"/>
                 <a:cs typeface="Calibri" pitchFamily="34" charset="-120"/>
               </a:rPr>
-              <a:t>Pooled interaction model</a:t>
+              <a:t>Two whole-sample models</a:t>
             </a:r>
             <a:endParaRPr lang="en-US" sz="1450" dirty="0"/>
           </a:p>
@@ -12399,13 +12388,13 @@
       </p:sp>
       <p:sp>
         <p:nvSpPr>
-          <p:cNvPr id="18" name="Shape 15"/>
-          <p:cNvSpPr/>
-          <p:nvPr/>
-        </p:nvSpPr>
-        <p:spPr>
-          <a:xfrm>
-            <a:off x="6515100" y="2724912"/>
+          <p:cNvPr id="25" name="Shape 22"/>
+          <p:cNvSpPr/>
+          <p:nvPr/>
+        </p:nvSpPr>
+        <p:spPr>
+          <a:xfrm>
+            <a:off x="841248" y="5010912"/>
             <a:ext cx="4832604" cy="384048"/>
           </a:xfrm>
           <a:prstGeom prst="roundRect">
@@ -12414,7 +12403,7 @@
             </a:avLst>
           </a:prstGeom>
           <a:solidFill>
-            <a:srgbClr val="EAF1F8"/>
+            <a:srgbClr val="EEE7F5"/>
           </a:solidFill>
           <a:ln/>
         </p:spPr>
@@ -12428,13 +12417,13 @@
       </p:sp>
       <p:sp>
         <p:nvSpPr>
-          <p:cNvPr id="19" name="Text 16"/>
-          <p:cNvSpPr/>
-          <p:nvPr/>
-        </p:nvSpPr>
-        <p:spPr>
-          <a:xfrm>
-            <a:off x="6643116" y="2724912"/>
+          <p:cNvPr id="26" name="Text 23"/>
+          <p:cNvSpPr/>
+          <p:nvPr/>
+        </p:nvSpPr>
+        <p:spPr>
+          <a:xfrm>
+            <a:off x="969264" y="5010912"/>
             <a:ext cx="4631436" cy="384048"/>
           </a:xfrm>
           <a:prstGeom prst="rect">
@@ -12453,13 +12442,13 @@
             <a:r>
               <a:rPr lang="en-US" sz="1020" dirty="0">
                 <a:solidFill>
-                  <a:srgbClr val="3B79B0"/>
+                  <a:srgbClr val="8A5BB0"/>
                 </a:solidFill>
                 <a:latin typeface="Consolas" pitchFamily="34" charset="0"/>
                 <a:ea typeface="Consolas" pitchFamily="34" charset="-122"/>
                 <a:cs typeface="Consolas" pitchFamily="34" charset="-120"/>
               </a:rPr>
-              <a:t>Do the distress slopes differ across groups?</a:t>
+              <a:t>Model A: distress only   ·   Model B: global additive</a:t>
             </a:r>
             <a:endParaRPr lang="en-US" sz="1020" dirty="0"/>
           </a:p>
@@ -12467,13 +12456,13 @@
       </p:sp>
       <p:sp>
         <p:nvSpPr>
-          <p:cNvPr id="20" name="Text 17"/>
-          <p:cNvSpPr/>
-          <p:nvPr/>
-        </p:nvSpPr>
-        <p:spPr>
-          <a:xfrm>
-            <a:off x="6515100" y="3163824"/>
+          <p:cNvPr id="27" name="Text 24"/>
+          <p:cNvSpPr/>
+          <p:nvPr/>
+        </p:nvSpPr>
+        <p:spPr>
+          <a:xfrm>
+            <a:off x="841248" y="5449824"/>
             <a:ext cx="4850892" cy="585216"/>
           </a:xfrm>
           <a:prstGeom prst="rect">
@@ -12501,533 +12490,7 @@
                 <a:ea typeface="Calibri" pitchFamily="34" charset="-122"/>
                 <a:cs typeface="Calibri" pitchFamily="34" charset="-120"/>
               </a:rPr>
-              <a:t>The falsifiable test of H2 - whether exercise buffers the distress→addiction link, and whether that differs by gender.</a:t>
-            </a:r>
-            <a:endParaRPr lang="en-US" sz="1100" dirty="0"/>
-          </a:p>
-        </p:txBody>
-      </p:sp>
-      <p:sp>
-        <p:nvSpPr>
-          <p:cNvPr id="21" name="Shape 18"/>
-          <p:cNvSpPr/>
-          <p:nvPr/>
-        </p:nvSpPr>
-        <p:spPr>
-          <a:xfrm>
-            <a:off x="566928" y="4114800"/>
-            <a:ext cx="5381244" cy="1993392"/>
-          </a:xfrm>
-          <a:prstGeom prst="roundRect">
-            <a:avLst>
-              <a:gd name="adj" fmla="val 3670"/>
-            </a:avLst>
-          </a:prstGeom>
-          <a:solidFill>
-            <a:srgbClr val="FFFFFF"/>
-          </a:solidFill>
-          <a:ln w="12700">
-            <a:solidFill>
-              <a:srgbClr val="E1E6F0"/>
-            </a:solidFill>
-            <a:prstDash val="solid"/>
-          </a:ln>
-          <a:effectLst>
-            <a:outerShdw blurRad="101600" dist="25400" dir="5400000" algn="bl" rotWithShape="0">
-              <a:srgbClr val="9AA8C8">
-                <a:alpha val="22000"/>
-              </a:srgbClr>
-            </a:outerShdw>
-          </a:effectLst>
-        </p:spPr>
-        <p:txBody>
-          <a:bodyPr/>
-          <a:lstStyle/>
-          <a:p>
-            <a:endParaRPr lang="he-IL"/>
-          </a:p>
-        </p:txBody>
-      </p:sp>
-      <p:sp>
-        <p:nvSpPr>
-          <p:cNvPr id="22" name="Shape 19"/>
-          <p:cNvSpPr/>
-          <p:nvPr/>
-        </p:nvSpPr>
-        <p:spPr>
-          <a:xfrm>
-            <a:off x="822960" y="4370832"/>
-            <a:ext cx="548640" cy="548640"/>
-          </a:xfrm>
-          <a:prstGeom prst="ellipse">
-            <a:avLst/>
-          </a:prstGeom>
-          <a:solidFill>
-            <a:srgbClr val="8A5BB0"/>
-          </a:solidFill>
-          <a:ln/>
-          <a:effectLst>
-            <a:outerShdw blurRad="114300" dist="38100" dir="5400000" algn="bl" rotWithShape="0">
-              <a:srgbClr val="0B1020">
-                <a:alpha val="16000"/>
-              </a:srgbClr>
-            </a:outerShdw>
-          </a:effectLst>
-        </p:spPr>
-        <p:txBody>
-          <a:bodyPr/>
-          <a:lstStyle/>
-          <a:p>
-            <a:endParaRPr lang="he-IL"/>
-          </a:p>
-        </p:txBody>
-      </p:sp>
-      <p:sp>
-        <p:nvSpPr>
-          <p:cNvPr id="23" name="Text 20"/>
-          <p:cNvSpPr/>
-          <p:nvPr/>
-        </p:nvSpPr>
-        <p:spPr>
-          <a:xfrm>
-            <a:off x="822960" y="4370832"/>
-            <a:ext cx="548640" cy="548640"/>
-          </a:xfrm>
-          <a:prstGeom prst="rect">
-            <a:avLst/>
-          </a:prstGeom>
-          <a:noFill/>
-          <a:ln/>
-        </p:spPr>
-        <p:txBody>
-          <a:bodyPr wrap="square" lIns="0" tIns="0" rIns="0" bIns="0" rtlCol="0" anchor="ctr"/>
-          <a:lstStyle/>
-          <a:p>
-            <a:pPr marL="0" indent="0" algn="ctr">
-              <a:buNone/>
-            </a:pPr>
-            <a:r>
-              <a:rPr lang="en-US" sz="2000" b="1" dirty="0">
-                <a:solidFill>
-                  <a:srgbClr val="FFFFFF"/>
-                </a:solidFill>
-                <a:latin typeface="Cambria" pitchFamily="34" charset="0"/>
-                <a:ea typeface="Cambria" pitchFamily="34" charset="-122"/>
-                <a:cs typeface="Cambria" pitchFamily="34" charset="-120"/>
-              </a:rPr>
-              <a:t>3</a:t>
-            </a:r>
-            <a:endParaRPr lang="en-US" sz="2000" dirty="0"/>
-          </a:p>
-        </p:txBody>
-      </p:sp>
-      <p:sp>
-        <p:nvSpPr>
-          <p:cNvPr id="24" name="Text 21"/>
-          <p:cNvSpPr/>
-          <p:nvPr/>
-        </p:nvSpPr>
-        <p:spPr>
-          <a:xfrm>
-            <a:off x="1517904" y="4370832"/>
-            <a:ext cx="4192524" cy="566928"/>
-          </a:xfrm>
-          <a:prstGeom prst="rect">
-            <a:avLst/>
-          </a:prstGeom>
-          <a:noFill/>
-          <a:ln/>
-        </p:spPr>
-        <p:txBody>
-          <a:bodyPr wrap="square" lIns="0" tIns="0" rIns="0" bIns="0" rtlCol="0" anchor="ctr"/>
-          <a:lstStyle/>
-          <a:p>
-            <a:pPr marL="0" indent="0">
-              <a:buNone/>
-            </a:pPr>
-            <a:r>
-              <a:rPr lang="en-US" sz="1450" b="1" dirty="0">
-                <a:solidFill>
-                  <a:srgbClr val="23305A"/>
-                </a:solidFill>
-                <a:latin typeface="Calibri" pitchFamily="34" charset="0"/>
-                <a:ea typeface="Calibri" pitchFamily="34" charset="-122"/>
-                <a:cs typeface="Calibri" pitchFamily="34" charset="-120"/>
-              </a:rPr>
-              <a:t>Two whole-sample models</a:t>
-            </a:r>
-            <a:endParaRPr lang="en-US" sz="1450" dirty="0"/>
-          </a:p>
-        </p:txBody>
-      </p:sp>
-      <p:sp>
-        <p:nvSpPr>
-          <p:cNvPr id="25" name="Shape 22"/>
-          <p:cNvSpPr/>
-          <p:nvPr/>
-        </p:nvSpPr>
-        <p:spPr>
-          <a:xfrm>
-            <a:off x="841248" y="5010912"/>
-            <a:ext cx="4832604" cy="384048"/>
-          </a:xfrm>
-          <a:prstGeom prst="roundRect">
-            <a:avLst>
-              <a:gd name="adj" fmla="val 11905"/>
-            </a:avLst>
-          </a:prstGeom>
-          <a:solidFill>
-            <a:srgbClr val="EEE7F5"/>
-          </a:solidFill>
-          <a:ln/>
-        </p:spPr>
-        <p:txBody>
-          <a:bodyPr/>
-          <a:lstStyle/>
-          <a:p>
-            <a:endParaRPr lang="he-IL"/>
-          </a:p>
-        </p:txBody>
-      </p:sp>
-      <p:sp>
-        <p:nvSpPr>
-          <p:cNvPr id="26" name="Text 23"/>
-          <p:cNvSpPr/>
-          <p:nvPr/>
-        </p:nvSpPr>
-        <p:spPr>
-          <a:xfrm>
-            <a:off x="969264" y="5010912"/>
-            <a:ext cx="4631436" cy="384048"/>
-          </a:xfrm>
-          <a:prstGeom prst="rect">
-            <a:avLst/>
-          </a:prstGeom>
-          <a:noFill/>
-          <a:ln/>
-        </p:spPr>
-        <p:txBody>
-          <a:bodyPr wrap="square" lIns="0" tIns="0" rIns="0" bIns="0" rtlCol="0" anchor="ctr"/>
-          <a:lstStyle/>
-          <a:p>
-            <a:pPr marL="0" indent="0">
-              <a:buNone/>
-            </a:pPr>
-            <a:r>
-              <a:rPr lang="en-US" sz="1020" dirty="0">
-                <a:solidFill>
-                  <a:srgbClr val="8A5BB0"/>
-                </a:solidFill>
-                <a:latin typeface="Consolas" pitchFamily="34" charset="0"/>
-                <a:ea typeface="Consolas" pitchFamily="34" charset="-122"/>
-                <a:cs typeface="Consolas" pitchFamily="34" charset="-120"/>
-              </a:rPr>
-              <a:t>Model A: distress only   ·   Model B: global additive</a:t>
-            </a:r>
-            <a:endParaRPr lang="en-US" sz="1020" dirty="0"/>
-          </a:p>
-        </p:txBody>
-      </p:sp>
-      <p:sp>
-        <p:nvSpPr>
-          <p:cNvPr id="27" name="Text 24"/>
-          <p:cNvSpPr/>
-          <p:nvPr/>
-        </p:nvSpPr>
-        <p:spPr>
-          <a:xfrm>
-            <a:off x="841248" y="5449824"/>
-            <a:ext cx="4850892" cy="585216"/>
-          </a:xfrm>
-          <a:prstGeom prst="rect">
-            <a:avLst/>
-          </a:prstGeom>
-          <a:noFill/>
-          <a:ln/>
-        </p:spPr>
-        <p:txBody>
-          <a:bodyPr wrap="square" lIns="0" tIns="0" rIns="0" bIns="0" rtlCol="0" anchor="t"/>
-          <a:lstStyle/>
-          <a:p>
-            <a:pPr marL="0" indent="0">
-              <a:lnSpc>
-                <a:spcPct val="105000"/>
-              </a:lnSpc>
-              <a:buNone/>
-            </a:pPr>
-            <a:r>
-              <a:rPr lang="en-US" sz="1100" dirty="0">
-                <a:solidFill>
-                  <a:srgbClr val="2C3247"/>
-                </a:solidFill>
-                <a:latin typeface="Calibri" pitchFamily="34" charset="0"/>
-                <a:ea typeface="Calibri" pitchFamily="34" charset="-122"/>
-                <a:cs typeface="Calibri" pitchFamily="34" charset="-120"/>
-              </a:rPr>
               <a:t>Fit once the interaction comes back null - Model B adds gender, exercise, bullied and age across all 819 students.</a:t>
-            </a:r>
-            <a:endParaRPr lang="en-US" sz="1100" dirty="0"/>
-          </a:p>
-        </p:txBody>
-      </p:sp>
-      <p:sp>
-        <p:nvSpPr>
-          <p:cNvPr id="28" name="Shape 25"/>
-          <p:cNvSpPr/>
-          <p:nvPr/>
-        </p:nvSpPr>
-        <p:spPr>
-          <a:xfrm>
-            <a:off x="6240780" y="4114800"/>
-            <a:ext cx="5381244" cy="1993392"/>
-          </a:xfrm>
-          <a:prstGeom prst="roundRect">
-            <a:avLst>
-              <a:gd name="adj" fmla="val 3670"/>
-            </a:avLst>
-          </a:prstGeom>
-          <a:solidFill>
-            <a:srgbClr val="FFFFFF"/>
-          </a:solidFill>
-          <a:ln w="12700">
-            <a:solidFill>
-              <a:srgbClr val="E1E6F0"/>
-            </a:solidFill>
-            <a:prstDash val="solid"/>
-          </a:ln>
-          <a:effectLst>
-            <a:outerShdw blurRad="101600" dist="25400" dir="5400000" algn="bl" rotWithShape="0">
-              <a:srgbClr val="9AA8C8">
-                <a:alpha val="22000"/>
-              </a:srgbClr>
-            </a:outerShdw>
-          </a:effectLst>
-        </p:spPr>
-        <p:txBody>
-          <a:bodyPr/>
-          <a:lstStyle/>
-          <a:p>
-            <a:endParaRPr lang="he-IL"/>
-          </a:p>
-        </p:txBody>
-      </p:sp>
-      <p:sp>
-        <p:nvSpPr>
-          <p:cNvPr id="29" name="Shape 26"/>
-          <p:cNvSpPr/>
-          <p:nvPr/>
-        </p:nvSpPr>
-        <p:spPr>
-          <a:xfrm>
-            <a:off x="6496812" y="4370832"/>
-            <a:ext cx="548640" cy="548640"/>
-          </a:xfrm>
-          <a:prstGeom prst="ellipse">
-            <a:avLst/>
-          </a:prstGeom>
-          <a:solidFill>
-            <a:srgbClr val="2E8B83"/>
-          </a:solidFill>
-          <a:ln/>
-          <a:effectLst>
-            <a:outerShdw blurRad="114300" dist="38100" dir="5400000" algn="bl" rotWithShape="0">
-              <a:srgbClr val="0B1020">
-                <a:alpha val="16000"/>
-              </a:srgbClr>
-            </a:outerShdw>
-          </a:effectLst>
-        </p:spPr>
-        <p:txBody>
-          <a:bodyPr/>
-          <a:lstStyle/>
-          <a:p>
-            <a:endParaRPr lang="he-IL"/>
-          </a:p>
-        </p:txBody>
-      </p:sp>
-      <p:sp>
-        <p:nvSpPr>
-          <p:cNvPr id="30" name="Text 27"/>
-          <p:cNvSpPr/>
-          <p:nvPr/>
-        </p:nvSpPr>
-        <p:spPr>
-          <a:xfrm>
-            <a:off x="6496812" y="4370832"/>
-            <a:ext cx="548640" cy="548640"/>
-          </a:xfrm>
-          <a:prstGeom prst="rect">
-            <a:avLst/>
-          </a:prstGeom>
-          <a:noFill/>
-          <a:ln/>
-        </p:spPr>
-        <p:txBody>
-          <a:bodyPr wrap="square" lIns="0" tIns="0" rIns="0" bIns="0" rtlCol="0" anchor="ctr"/>
-          <a:lstStyle/>
-          <a:p>
-            <a:pPr marL="0" indent="0" algn="ctr">
-              <a:buNone/>
-            </a:pPr>
-            <a:r>
-              <a:rPr lang="en-US" sz="2000" b="1" dirty="0">
-                <a:solidFill>
-                  <a:srgbClr val="FFFFFF"/>
-                </a:solidFill>
-                <a:latin typeface="Cambria" pitchFamily="34" charset="0"/>
-                <a:ea typeface="Cambria" pitchFamily="34" charset="-122"/>
-                <a:cs typeface="Cambria" pitchFamily="34" charset="-120"/>
-              </a:rPr>
-              <a:t>4</a:t>
-            </a:r>
-            <a:endParaRPr lang="en-US" sz="2000" dirty="0"/>
-          </a:p>
-        </p:txBody>
-      </p:sp>
-      <p:sp>
-        <p:nvSpPr>
-          <p:cNvPr id="31" name="Text 28"/>
-          <p:cNvSpPr/>
-          <p:nvPr/>
-        </p:nvSpPr>
-        <p:spPr>
-          <a:xfrm>
-            <a:off x="7191756" y="4370832"/>
-            <a:ext cx="4192524" cy="566928"/>
-          </a:xfrm>
-          <a:prstGeom prst="rect">
-            <a:avLst/>
-          </a:prstGeom>
-          <a:noFill/>
-          <a:ln/>
-        </p:spPr>
-        <p:txBody>
-          <a:bodyPr wrap="square" lIns="0" tIns="0" rIns="0" bIns="0" rtlCol="0" anchor="ctr"/>
-          <a:lstStyle/>
-          <a:p>
-            <a:pPr marL="0" indent="0">
-              <a:buNone/>
-            </a:pPr>
-            <a:r>
-              <a:rPr lang="en-US" sz="1450" b="1" dirty="0">
-                <a:solidFill>
-                  <a:srgbClr val="23305A"/>
-                </a:solidFill>
-                <a:latin typeface="Calibri" pitchFamily="34" charset="0"/>
-                <a:ea typeface="Calibri" pitchFamily="34" charset="-122"/>
-                <a:cs typeface="Calibri" pitchFamily="34" charset="-120"/>
-              </a:rPr>
-              <a:t>Logistic forecast of P(addicted)</a:t>
-            </a:r>
-            <a:endParaRPr lang="en-US" sz="1450" dirty="0"/>
-          </a:p>
-        </p:txBody>
-      </p:sp>
-      <p:sp>
-        <p:nvSpPr>
-          <p:cNvPr id="32" name="Shape 29"/>
-          <p:cNvSpPr/>
-          <p:nvPr/>
-        </p:nvSpPr>
-        <p:spPr>
-          <a:xfrm>
-            <a:off x="6515100" y="5010912"/>
-            <a:ext cx="4832604" cy="384048"/>
-          </a:xfrm>
-          <a:prstGeom prst="roundRect">
-            <a:avLst>
-              <a:gd name="adj" fmla="val 11905"/>
-            </a:avLst>
-          </a:prstGeom>
-          <a:solidFill>
-            <a:srgbClr val="E3F1EF"/>
-          </a:solidFill>
-          <a:ln/>
-        </p:spPr>
-        <p:txBody>
-          <a:bodyPr/>
-          <a:lstStyle/>
-          <a:p>
-            <a:endParaRPr lang="he-IL"/>
-          </a:p>
-        </p:txBody>
-      </p:sp>
-      <p:sp>
-        <p:nvSpPr>
-          <p:cNvPr id="33" name="Text 30"/>
-          <p:cNvSpPr/>
-          <p:nvPr/>
-        </p:nvSpPr>
-        <p:spPr>
-          <a:xfrm>
-            <a:off x="6643116" y="5010912"/>
-            <a:ext cx="4631436" cy="384048"/>
-          </a:xfrm>
-          <a:prstGeom prst="rect">
-            <a:avLst/>
-          </a:prstGeom>
-          <a:noFill/>
-          <a:ln/>
-        </p:spPr>
-        <p:txBody>
-          <a:bodyPr wrap="square" lIns="0" tIns="0" rIns="0" bIns="0" rtlCol="0" anchor="ctr"/>
-          <a:lstStyle/>
-          <a:p>
-            <a:pPr marL="0" indent="0">
-              <a:buNone/>
-            </a:pPr>
-            <a:r>
-              <a:rPr lang="en-US" sz="1020" dirty="0">
-                <a:solidFill>
-                  <a:srgbClr val="2E8B83"/>
-                </a:solidFill>
-                <a:latin typeface="Consolas" pitchFamily="34" charset="0"/>
-                <a:ea typeface="Consolas" pitchFamily="34" charset="-122"/>
-                <a:cs typeface="Consolas" pitchFamily="34" charset="-120"/>
-              </a:rPr>
-              <a:t>~ depression + loneliness + gender + exercise + age + bullied</a:t>
-            </a:r>
-            <a:endParaRPr lang="en-US" sz="1020" dirty="0"/>
-          </a:p>
-        </p:txBody>
-      </p:sp>
-      <p:sp>
-        <p:nvSpPr>
-          <p:cNvPr id="34" name="Text 31"/>
-          <p:cNvSpPr/>
-          <p:nvPr/>
-        </p:nvSpPr>
-        <p:spPr>
-          <a:xfrm>
-            <a:off x="6515100" y="5449824"/>
-            <a:ext cx="4850892" cy="585216"/>
-          </a:xfrm>
-          <a:prstGeom prst="rect">
-            <a:avLst/>
-          </a:prstGeom>
-          <a:noFill/>
-          <a:ln/>
-        </p:spPr>
-        <p:txBody>
-          <a:bodyPr wrap="square" lIns="0" tIns="0" rIns="0" bIns="0" rtlCol="0" anchor="t"/>
-          <a:lstStyle/>
-          <a:p>
-            <a:pPr marL="0" indent="0">
-              <a:lnSpc>
-                <a:spcPct val="105000"/>
-              </a:lnSpc>
-              <a:buNone/>
-            </a:pPr>
-            <a:r>
-              <a:rPr lang="en-US" sz="1100" dirty="0">
-                <a:solidFill>
-                  <a:srgbClr val="2C3247"/>
-                </a:solidFill>
-                <a:latin typeface="Calibri" pitchFamily="34" charset="0"/>
-                <a:ea typeface="Calibri" pitchFamily="34" charset="-122"/>
-                <a:cs typeface="Calibri" pitchFamily="34" charset="-120"/>
-              </a:rPr>
-              <a:t>70/30 stratified split: fit on train, score on the held-out test. ROC / AUC + confusion matrix; odds ratios on the full sample.</a:t>
             </a:r>
             <a:endParaRPr lang="en-US" sz="1100" dirty="0"/>
           </a:p>
@@ -13066,7 +12529,7 @@
                 <a:ea typeface="Calibri" pitchFamily="34" charset="-122"/>
                 <a:cs typeface="Calibri" pitchFamily="34" charset="-120"/>
               </a:rPr>
-              <a:t>Group 6  ·  CIS2601 - Internet Addiction across gender × Exercise groups</a:t>
+              <a:t>Group 2  ·  CIS2601 - Internet Addiction across gender × Exercise groups</a:t>
             </a:r>
             <a:endParaRPr lang="en-US" sz="850" dirty="0"/>
           </a:p>
@@ -13271,10 +12734,8 @@
                   <a:srgbClr val="23305A"/>
                 </a:solidFill>
                 <a:latin typeface="Cambria" pitchFamily="34" charset="0"/>
-                <a:ea typeface="Cambria" pitchFamily="34" charset="-122"/>
-                <a:cs typeface="Cambria" pitchFamily="34" charset="-120"/>
-              </a:rPr>
-              <a:t>Depression drives addiction in every group</a:t>
+              </a:rPr>
+              <a:t>On the models – Exploratory and Predictor</a:t>
             </a:r>
             <a:endParaRPr lang="en-US" sz="2500" dirty="0"/>
           </a:p>
@@ -13288,8 +12749,8 @@
         </p:nvSpPr>
         <p:spPr>
           <a:xfrm>
-            <a:off x="566928" y="1371600"/>
-            <a:ext cx="6126480" cy="3017520"/>
+            <a:off x="124968" y="1371600"/>
+            <a:ext cx="6527292" cy="3017520"/>
           </a:xfrm>
           <a:prstGeom prst="roundRect">
             <a:avLst>
@@ -13337,7 +12798,7 @@
         </p:blipFill>
         <p:spPr>
           <a:xfrm>
-            <a:off x="1177747" y="1517904"/>
+            <a:off x="858520" y="1517904"/>
             <a:ext cx="4904842" cy="2724912"/>
           </a:xfrm>
           <a:prstGeom prst="rect">
@@ -13353,8 +12814,8 @@
         </p:nvSpPr>
         <p:spPr>
           <a:xfrm>
-            <a:off x="566928" y="4535424"/>
-            <a:ext cx="1908048" cy="1371600"/>
+            <a:off x="124968" y="4535424"/>
+            <a:ext cx="1908048" cy="1773936"/>
           </a:xfrm>
           <a:prstGeom prst="roundRect">
             <a:avLst>
@@ -13387,7 +12848,7 @@
         </p:nvSpPr>
         <p:spPr>
           <a:xfrm>
-            <a:off x="713232" y="4663440"/>
+            <a:off x="271272" y="4663440"/>
             <a:ext cx="1633728" cy="457200"/>
           </a:xfrm>
           <a:prstGeom prst="rect">
@@ -13426,7 +12887,7 @@
         </p:nvSpPr>
         <p:spPr>
           <a:xfrm>
-            <a:off x="713232" y="5102352"/>
+            <a:off x="271272" y="5102352"/>
             <a:ext cx="1652016" cy="731520"/>
           </a:xfrm>
           <a:prstGeom prst="rect">
@@ -13462,22 +12923,317 @@
       </p:sp>
       <p:sp>
         <p:nvSpPr>
-          <p:cNvPr id="11" name="Shape 7"/>
-          <p:cNvSpPr/>
-          <p:nvPr/>
-        </p:nvSpPr>
-        <p:spPr>
-          <a:xfrm>
-            <a:off x="2676144" y="4535424"/>
-            <a:ext cx="1908048" cy="1371600"/>
+          <p:cNvPr id="17" name="Shape 13"/>
+          <p:cNvSpPr/>
+          <p:nvPr/>
+        </p:nvSpPr>
+        <p:spPr>
+          <a:xfrm>
+            <a:off x="2179320" y="4572000"/>
+            <a:ext cx="4472940" cy="1737360"/>
           </a:xfrm>
           <a:prstGeom prst="roundRect">
             <a:avLst>
-              <a:gd name="adj" fmla="val 4667"/>
+              <a:gd name="adj" fmla="val 4211"/>
             </a:avLst>
           </a:prstGeom>
           <a:solidFill>
-            <a:srgbClr val="EAF1F8"/>
+            <a:srgbClr val="131A33"/>
+          </a:solidFill>
+          <a:ln/>
+          <a:effectLst>
+            <a:outerShdw blurRad="114300" dist="38100" dir="5400000" algn="bl" rotWithShape="0">
+              <a:srgbClr val="0B1020">
+                <a:alpha val="16000"/>
+              </a:srgbClr>
+            </a:outerShdw>
+          </a:effectLst>
+        </p:spPr>
+        <p:txBody>
+          <a:bodyPr/>
+          <a:lstStyle/>
+          <a:p>
+            <a:endParaRPr lang="he-IL"/>
+          </a:p>
+        </p:txBody>
+      </p:sp>
+      <p:sp>
+        <p:nvSpPr>
+          <p:cNvPr id="18" name="Shape 14"/>
+          <p:cNvSpPr/>
+          <p:nvPr/>
+        </p:nvSpPr>
+        <p:spPr>
+          <a:xfrm>
+            <a:off x="2453640" y="4791456"/>
+            <a:ext cx="457200" cy="457200"/>
+          </a:xfrm>
+          <a:prstGeom prst="ellipse">
+            <a:avLst/>
+          </a:prstGeom>
+          <a:solidFill>
+            <a:srgbClr val="2A3358"/>
+          </a:solidFill>
+          <a:ln/>
+        </p:spPr>
+        <p:txBody>
+          <a:bodyPr/>
+          <a:lstStyle/>
+          <a:p>
+            <a:endParaRPr lang="he-IL"/>
+          </a:p>
+        </p:txBody>
+      </p:sp>
+      <p:pic>
+        <p:nvPicPr>
+          <p:cNvPr id="19" name="Image 2" descr="preencoded.png"/>
+          <p:cNvPicPr>
+            <a:picLocks noChangeAspect="1"/>
+          </p:cNvPicPr>
+          <p:nvPr/>
+        </p:nvPicPr>
+        <p:blipFill>
+          <a:blip r:embed="rId5"/>
+          <a:stretch>
+            <a:fillRect/>
+          </a:stretch>
+        </p:blipFill>
+        <p:spPr>
+          <a:xfrm>
+            <a:off x="2581656" y="4919472"/>
+            <a:ext cx="201168" cy="201168"/>
+          </a:xfrm>
+          <a:prstGeom prst="rect">
+            <a:avLst/>
+          </a:prstGeom>
+        </p:spPr>
+      </p:pic>
+      <p:sp>
+        <p:nvSpPr>
+          <p:cNvPr id="20" name="Text 15"/>
+          <p:cNvSpPr/>
+          <p:nvPr/>
+        </p:nvSpPr>
+        <p:spPr>
+          <a:xfrm>
+            <a:off x="3057144" y="4773168"/>
+            <a:ext cx="3447288" cy="274320"/>
+          </a:xfrm>
+          <a:prstGeom prst="rect">
+            <a:avLst/>
+          </a:prstGeom>
+          <a:noFill/>
+          <a:ln/>
+        </p:spPr>
+        <p:txBody>
+          <a:bodyPr wrap="square" lIns="0" tIns="0" rIns="0" bIns="0" rtlCol="0" anchor="ctr"/>
+          <a:lstStyle/>
+          <a:p>
+            <a:pPr marL="0" indent="0">
+              <a:buNone/>
+            </a:pPr>
+            <a:r>
+              <a:rPr lang="en-US" sz="1100" b="1" kern="0" spc="100" dirty="0">
+                <a:solidFill>
+                  <a:srgbClr val="AFC2E8"/>
+                </a:solidFill>
+                <a:latin typeface="Calibri" pitchFamily="34" charset="0"/>
+                <a:ea typeface="Calibri" pitchFamily="34" charset="-122"/>
+                <a:cs typeface="Calibri" pitchFamily="34" charset="-120"/>
+              </a:rPr>
+              <a:t>DO THE SLOPES DIFFER ACROSS GROUPS?</a:t>
+            </a:r>
+            <a:endParaRPr lang="en-US" sz="1100" dirty="0"/>
+          </a:p>
+        </p:txBody>
+      </p:sp>
+      <p:sp>
+        <p:nvSpPr>
+          <p:cNvPr id="21" name="Text 16"/>
+          <p:cNvSpPr/>
+          <p:nvPr/>
+        </p:nvSpPr>
+        <p:spPr>
+          <a:xfrm>
+            <a:off x="3057144" y="5065776"/>
+            <a:ext cx="3447288" cy="329184"/>
+          </a:xfrm>
+          <a:prstGeom prst="rect">
+            <a:avLst/>
+          </a:prstGeom>
+          <a:noFill/>
+          <a:ln/>
+        </p:spPr>
+        <p:txBody>
+          <a:bodyPr wrap="square" lIns="0" tIns="0" rIns="0" bIns="0" rtlCol="0" anchor="ctr"/>
+          <a:lstStyle/>
+          <a:p>
+            <a:pPr marL="0" indent="0">
+              <a:buNone/>
+            </a:pPr>
+            <a:r>
+              <a:rPr lang="en-US" sz="1400" b="1" dirty="0">
+                <a:solidFill>
+                  <a:srgbClr val="DA5740"/>
+                </a:solidFill>
+                <a:latin typeface="Calibri" pitchFamily="34" charset="0"/>
+                <a:ea typeface="Calibri" pitchFamily="34" charset="-122"/>
+                <a:cs typeface="Calibri" pitchFamily="34" charset="-120"/>
+              </a:rPr>
+              <a:t>No. </a:t>
+            </a:r>
+            <a:r>
+              <a:rPr lang="en-US" sz="1400" b="1" dirty="0">
+                <a:solidFill>
+                  <a:srgbClr val="FFFFFF"/>
+                </a:solidFill>
+                <a:latin typeface="Calibri" pitchFamily="34" charset="0"/>
+                <a:ea typeface="Calibri" pitchFamily="34" charset="-122"/>
+                <a:cs typeface="Calibri" pitchFamily="34" charset="-120"/>
+              </a:rPr>
+              <a:t>Interaction F(6, 805) = 0.65, p = 0.69.</a:t>
+            </a:r>
+            <a:endParaRPr lang="en-US" sz="1400" dirty="0"/>
+          </a:p>
+        </p:txBody>
+      </p:sp>
+      <p:sp>
+        <p:nvSpPr>
+          <p:cNvPr id="22" name="Text 17"/>
+          <p:cNvSpPr/>
+          <p:nvPr/>
+        </p:nvSpPr>
+        <p:spPr>
+          <a:xfrm>
+            <a:off x="2490216" y="5486400"/>
+            <a:ext cx="3959352" cy="713232"/>
+          </a:xfrm>
+          <a:prstGeom prst="rect">
+            <a:avLst/>
+          </a:prstGeom>
+          <a:noFill/>
+          <a:ln/>
+        </p:spPr>
+        <p:txBody>
+          <a:bodyPr wrap="square" lIns="0" tIns="0" rIns="0" bIns="0" rtlCol="0" anchor="t"/>
+          <a:lstStyle/>
+          <a:p>
+            <a:pPr marL="0" indent="0">
+              <a:lnSpc>
+                <a:spcPct val="108000"/>
+              </a:lnSpc>
+              <a:buNone/>
+            </a:pPr>
+            <a:r>
+              <a:rPr lang="en-US" sz="1150" dirty="0">
+                <a:solidFill>
+                  <a:srgbClr val="E4E9F4"/>
+                </a:solidFill>
+                <a:latin typeface="Calibri" pitchFamily="34" charset="0"/>
+                <a:ea typeface="Calibri" pitchFamily="34" charset="-122"/>
+                <a:cs typeface="Calibri" pitchFamily="34" charset="-120"/>
+              </a:rPr>
+              <a:t>Depression pushes addiction just as hard for non-exercising boys as for exercising girls. This contradicts H2 (exercise buffering).</a:t>
+            </a:r>
+            <a:endParaRPr lang="en-US" sz="1150" dirty="0"/>
+          </a:p>
+        </p:txBody>
+      </p:sp>
+      <p:sp>
+        <p:nvSpPr>
+          <p:cNvPr id="29" name="Text 23"/>
+          <p:cNvSpPr/>
+          <p:nvPr/>
+        </p:nvSpPr>
+        <p:spPr>
+          <a:xfrm>
+            <a:off x="566928" y="6455664"/>
+            <a:ext cx="8686800" cy="274320"/>
+          </a:xfrm>
+          <a:prstGeom prst="rect">
+            <a:avLst/>
+          </a:prstGeom>
+          <a:noFill/>
+          <a:ln/>
+        </p:spPr>
+        <p:txBody>
+          <a:bodyPr wrap="square" lIns="0" tIns="0" rIns="0" bIns="0" rtlCol="0" anchor="ctr"/>
+          <a:lstStyle/>
+          <a:p>
+            <a:pPr marL="0" indent="0" algn="l">
+              <a:buNone/>
+            </a:pPr>
+            <a:r>
+              <a:rPr lang="en-US" sz="850" dirty="0">
+                <a:solidFill>
+                  <a:srgbClr val="6C7488"/>
+                </a:solidFill>
+                <a:latin typeface="Calibri" pitchFamily="34" charset="0"/>
+                <a:ea typeface="Calibri" pitchFamily="34" charset="-122"/>
+                <a:cs typeface="Calibri" pitchFamily="34" charset="-120"/>
+              </a:rPr>
+              <a:t>Group 2  ·  CIS2601 - Internet Addiction across gender × Exercise groups</a:t>
+            </a:r>
+            <a:endParaRPr lang="en-US" sz="850" dirty="0"/>
+          </a:p>
+        </p:txBody>
+      </p:sp>
+      <p:sp>
+        <p:nvSpPr>
+          <p:cNvPr id="23" name="TextBox 22">
+            <a:extLst>
+              <a:ext uri="{FF2B5EF4-FFF2-40B4-BE49-F238E27FC236}">
+                <a16:creationId xmlns:a16="http://schemas.microsoft.com/office/drawing/2014/main" id="{7CA71A89-3961-D8D4-A55C-6191457875D4}"/>
+              </a:ext>
+            </a:extLst>
+          </p:cNvPr>
+          <p:cNvSpPr txBox="1"/>
+          <p:nvPr/>
+        </p:nvSpPr>
+        <p:spPr>
+          <a:xfrm>
+            <a:off x="2163064" y="4541520"/>
+            <a:ext cx="184731" cy="369332"/>
+          </a:xfrm>
+          <a:prstGeom prst="rect">
+            <a:avLst/>
+          </a:prstGeom>
+          <a:noFill/>
+        </p:spPr>
+        <p:txBody>
+          <a:bodyPr wrap="square" rtlCol="0">
+            <a:spAutoFit/>
+          </a:bodyPr>
+          <a:lstStyle/>
+          <a:p>
+            <a:endParaRPr lang="en-IL" dirty="0"/>
+          </a:p>
+        </p:txBody>
+      </p:sp>
+      <p:sp>
+        <p:nvSpPr>
+          <p:cNvPr id="24" name="Shape 4">
+            <a:extLst>
+              <a:ext uri="{FF2B5EF4-FFF2-40B4-BE49-F238E27FC236}">
+                <a16:creationId xmlns:a16="http://schemas.microsoft.com/office/drawing/2014/main" id="{D0DA6637-F402-7BDD-7124-02DBCF710374}"/>
+              </a:ext>
+            </a:extLst>
+          </p:cNvPr>
+          <p:cNvSpPr/>
+          <p:nvPr/>
+        </p:nvSpPr>
+        <p:spPr>
+          <a:xfrm>
+            <a:off x="6693408" y="1405890"/>
+            <a:ext cx="5381244" cy="1993392"/>
+          </a:xfrm>
+          <a:prstGeom prst="roundRect">
+            <a:avLst>
+              <a:gd name="adj" fmla="val 3670"/>
+            </a:avLst>
+          </a:prstGeom>
+          <a:solidFill>
+            <a:srgbClr val="FFFFFF"/>
           </a:solidFill>
           <a:ln w="12700">
             <a:solidFill>
@@ -13485,6 +13241,13 @@
             </a:solidFill>
             <a:prstDash val="solid"/>
           </a:ln>
+          <a:effectLst>
+            <a:outerShdw blurRad="101600" dist="25400" dir="5400000" algn="bl" rotWithShape="0">
+              <a:srgbClr val="9AA8C8">
+                <a:alpha val="22000"/>
+              </a:srgbClr>
+            </a:outerShdw>
+          </a:effectLst>
         </p:spPr>
         <p:txBody>
           <a:bodyPr/>
@@ -13496,14 +13259,60 @@
       </p:sp>
       <p:sp>
         <p:nvSpPr>
-          <p:cNvPr id="12" name="Text 8"/>
-          <p:cNvSpPr/>
-          <p:nvPr/>
-        </p:nvSpPr>
-        <p:spPr>
-          <a:xfrm>
-            <a:off x="2822448" y="4663440"/>
-            <a:ext cx="1633728" cy="457200"/>
+          <p:cNvPr id="25" name="Shape 5">
+            <a:extLst>
+              <a:ext uri="{FF2B5EF4-FFF2-40B4-BE49-F238E27FC236}">
+                <a16:creationId xmlns:a16="http://schemas.microsoft.com/office/drawing/2014/main" id="{FA5E5FD5-07AC-5D8A-56C7-8B275E10213F}"/>
+              </a:ext>
+            </a:extLst>
+          </p:cNvPr>
+          <p:cNvSpPr/>
+          <p:nvPr/>
+        </p:nvSpPr>
+        <p:spPr>
+          <a:xfrm>
+            <a:off x="6949440" y="1661922"/>
+            <a:ext cx="548640" cy="548640"/>
+          </a:xfrm>
+          <a:prstGeom prst="ellipse">
+            <a:avLst/>
+          </a:prstGeom>
+          <a:solidFill>
+            <a:srgbClr val="DA5740"/>
+          </a:solidFill>
+          <a:ln/>
+          <a:effectLst>
+            <a:outerShdw blurRad="114300" dist="38100" dir="5400000" algn="bl" rotWithShape="0">
+              <a:srgbClr val="0B1020">
+                <a:alpha val="16000"/>
+              </a:srgbClr>
+            </a:outerShdw>
+          </a:effectLst>
+        </p:spPr>
+        <p:txBody>
+          <a:bodyPr/>
+          <a:lstStyle/>
+          <a:p>
+            <a:endParaRPr lang="he-IL"/>
+          </a:p>
+        </p:txBody>
+      </p:sp>
+      <p:sp>
+        <p:nvSpPr>
+          <p:cNvPr id="26" name="Text 6">
+            <a:extLst>
+              <a:ext uri="{FF2B5EF4-FFF2-40B4-BE49-F238E27FC236}">
+                <a16:creationId xmlns:a16="http://schemas.microsoft.com/office/drawing/2014/main" id="{E892124E-A0BA-31BE-DEFF-A6DA69175B34}"/>
+              </a:ext>
+            </a:extLst>
+          </p:cNvPr>
+          <p:cNvSpPr/>
+          <p:nvPr/>
+        </p:nvSpPr>
+        <p:spPr>
+          <a:xfrm>
+            <a:off x="6949440" y="1661922"/>
+            <a:ext cx="548640" cy="548640"/>
           </a:xfrm>
           <a:prstGeom prst="rect">
             <a:avLst/>
@@ -13515,34 +13324,163 @@
           <a:bodyPr wrap="square" lIns="0" tIns="0" rIns="0" bIns="0" rtlCol="0" anchor="ctr"/>
           <a:lstStyle/>
           <a:p>
-            <a:pPr marL="0" indent="0" algn="l">
-              <a:buNone/>
-            </a:pPr>
-            <a:r>
-              <a:rPr lang="en-US" sz="1800" b="1" dirty="0">
-                <a:solidFill>
-                  <a:srgbClr val="3B79B0"/>
+            <a:pPr marL="0" indent="0" algn="ctr">
+              <a:buNone/>
+            </a:pPr>
+            <a:r>
+              <a:rPr lang="en-US" sz="2000" b="1" dirty="0">
+                <a:solidFill>
+                  <a:srgbClr val="FFFFFF"/>
                 </a:solidFill>
                 <a:latin typeface="Cambria" pitchFamily="34" charset="0"/>
-                <a:ea typeface="Cambria" pitchFamily="34" charset="-122"/>
-                <a:cs typeface="Cambria" pitchFamily="34" charset="-120"/>
-              </a:rPr>
-              <a:t>25–34%</a:t>
-            </a:r>
-            <a:endParaRPr lang="en-US" sz="1800" dirty="0"/>
-          </a:p>
-        </p:txBody>
-      </p:sp>
-      <p:sp>
-        <p:nvSpPr>
-          <p:cNvPr id="13" name="Text 9"/>
-          <p:cNvSpPr/>
-          <p:nvPr/>
-        </p:nvSpPr>
-        <p:spPr>
-          <a:xfrm>
-            <a:off x="2822448" y="5102352"/>
-            <a:ext cx="1652016" cy="731520"/>
+              </a:rPr>
+              <a:t>*</a:t>
+            </a:r>
+            <a:endParaRPr lang="en-US" sz="2000" dirty="0"/>
+          </a:p>
+        </p:txBody>
+      </p:sp>
+      <p:sp>
+        <p:nvSpPr>
+          <p:cNvPr id="27" name="Text 7">
+            <a:extLst>
+              <a:ext uri="{FF2B5EF4-FFF2-40B4-BE49-F238E27FC236}">
+                <a16:creationId xmlns:a16="http://schemas.microsoft.com/office/drawing/2014/main" id="{C4F5AD4B-D5D9-42B4-9DCB-D2832C31ABCB}"/>
+              </a:ext>
+            </a:extLst>
+          </p:cNvPr>
+          <p:cNvSpPr/>
+          <p:nvPr/>
+        </p:nvSpPr>
+        <p:spPr>
+          <a:xfrm>
+            <a:off x="7644384" y="1661922"/>
+            <a:ext cx="4192524" cy="566928"/>
+          </a:xfrm>
+          <a:prstGeom prst="rect">
+            <a:avLst/>
+          </a:prstGeom>
+          <a:noFill/>
+          <a:ln/>
+        </p:spPr>
+        <p:txBody>
+          <a:bodyPr wrap="square" lIns="0" tIns="0" rIns="0" bIns="0" rtlCol="0" anchor="ctr"/>
+          <a:lstStyle/>
+          <a:p>
+            <a:pPr marL="0" indent="0">
+              <a:buNone/>
+            </a:pPr>
+            <a:r>
+              <a:rPr lang="en-US" sz="1450" b="1" dirty="0">
+                <a:solidFill>
+                  <a:srgbClr val="23305A"/>
+                </a:solidFill>
+                <a:latin typeface="Calibri" pitchFamily="34" charset="0"/>
+                <a:ea typeface="Calibri" pitchFamily="34" charset="-122"/>
+                <a:cs typeface="Calibri" pitchFamily="34" charset="-120"/>
+              </a:rPr>
+              <a:t>Four linear regressions - one per group</a:t>
+            </a:r>
+            <a:endParaRPr lang="en-US" sz="1450" dirty="0"/>
+          </a:p>
+        </p:txBody>
+      </p:sp>
+      <p:sp>
+        <p:nvSpPr>
+          <p:cNvPr id="28" name="Shape 8">
+            <a:extLst>
+              <a:ext uri="{FF2B5EF4-FFF2-40B4-BE49-F238E27FC236}">
+                <a16:creationId xmlns:a16="http://schemas.microsoft.com/office/drawing/2014/main" id="{7FC3FF2E-126C-CF5F-A579-A245AE2A0D14}"/>
+              </a:ext>
+            </a:extLst>
+          </p:cNvPr>
+          <p:cNvSpPr/>
+          <p:nvPr/>
+        </p:nvSpPr>
+        <p:spPr>
+          <a:xfrm>
+            <a:off x="6967728" y="2302002"/>
+            <a:ext cx="4832604" cy="384048"/>
+          </a:xfrm>
+          <a:prstGeom prst="roundRect">
+            <a:avLst>
+              <a:gd name="adj" fmla="val 11905"/>
+            </a:avLst>
+          </a:prstGeom>
+          <a:solidFill>
+            <a:srgbClr val="FAEAE6"/>
+          </a:solidFill>
+          <a:ln/>
+        </p:spPr>
+        <p:txBody>
+          <a:bodyPr/>
+          <a:lstStyle/>
+          <a:p>
+            <a:endParaRPr lang="he-IL"/>
+          </a:p>
+        </p:txBody>
+      </p:sp>
+      <p:sp>
+        <p:nvSpPr>
+          <p:cNvPr id="31" name="Text 9">
+            <a:extLst>
+              <a:ext uri="{FF2B5EF4-FFF2-40B4-BE49-F238E27FC236}">
+                <a16:creationId xmlns:a16="http://schemas.microsoft.com/office/drawing/2014/main" id="{8CAB421B-1FE0-F544-ED40-C3CBCF586B7F}"/>
+              </a:ext>
+            </a:extLst>
+          </p:cNvPr>
+          <p:cNvSpPr/>
+          <p:nvPr/>
+        </p:nvSpPr>
+        <p:spPr>
+          <a:xfrm>
+            <a:off x="7095744" y="2302002"/>
+            <a:ext cx="4631436" cy="384048"/>
+          </a:xfrm>
+          <a:prstGeom prst="rect">
+            <a:avLst/>
+          </a:prstGeom>
+          <a:noFill/>
+          <a:ln/>
+        </p:spPr>
+        <p:txBody>
+          <a:bodyPr wrap="square" lIns="0" tIns="0" rIns="0" bIns="0" rtlCol="0" anchor="ctr"/>
+          <a:lstStyle/>
+          <a:p>
+            <a:pPr marL="0" indent="0">
+              <a:buNone/>
+            </a:pPr>
+            <a:r>
+              <a:rPr lang="en-US" sz="1020" dirty="0">
+                <a:solidFill>
+                  <a:srgbClr val="DA5740"/>
+                </a:solidFill>
+                <a:latin typeface="Consolas" pitchFamily="34" charset="0"/>
+                <a:ea typeface="Consolas" pitchFamily="34" charset="-122"/>
+                <a:cs typeface="Consolas" pitchFamily="34" charset="-120"/>
+              </a:rPr>
+              <a:t>TotalIA ~ depression + loneliness + age + bullied</a:t>
+            </a:r>
+            <a:endParaRPr lang="en-US" sz="1020" dirty="0"/>
+          </a:p>
+        </p:txBody>
+      </p:sp>
+      <p:sp>
+        <p:nvSpPr>
+          <p:cNvPr id="32" name="Text 10">
+            <a:extLst>
+              <a:ext uri="{FF2B5EF4-FFF2-40B4-BE49-F238E27FC236}">
+                <a16:creationId xmlns:a16="http://schemas.microsoft.com/office/drawing/2014/main" id="{54270BD1-7D6C-28C0-F6CC-6D802E6A7922}"/>
+              </a:ext>
+            </a:extLst>
+          </p:cNvPr>
+          <p:cNvSpPr/>
+          <p:nvPr/>
+        </p:nvSpPr>
+        <p:spPr>
+          <a:xfrm>
+            <a:off x="6967728" y="2740914"/>
+            <a:ext cx="4850892" cy="585216"/>
           </a:xfrm>
           <a:prstGeom prst="rect">
             <a:avLst/>
@@ -13556,12 +13494,12 @@
           <a:p>
             <a:pPr marL="0" indent="0">
               <a:lnSpc>
-                <a:spcPct val="100000"/>
+                <a:spcPct val="105000"/>
               </a:lnSpc>
               <a:buNone/>
             </a:pPr>
             <a:r>
-              <a:rPr lang="en-US" sz="1000" dirty="0">
+              <a:rPr lang="en-US" sz="1100" dirty="0">
                 <a:solidFill>
                   <a:srgbClr val="2C3247"/>
                 </a:solidFill>
@@ -13569,30 +13507,36 @@
                 <a:ea typeface="Calibri" pitchFamily="34" charset="-122"/>
                 <a:cs typeface="Calibri" pitchFamily="34" charset="-120"/>
               </a:rPr>
-              <a:t>of variance explained per group</a:t>
-            </a:r>
-            <a:endParaRPr lang="en-US" sz="1000" dirty="0"/>
-          </a:p>
-        </p:txBody>
-      </p:sp>
-      <p:sp>
-        <p:nvSpPr>
-          <p:cNvPr id="14" name="Shape 10"/>
-          <p:cNvSpPr/>
-          <p:nvPr/>
-        </p:nvSpPr>
-        <p:spPr>
-          <a:xfrm>
-            <a:off x="4785360" y="4535424"/>
-            <a:ext cx="1908048" cy="1371600"/>
+              <a:t>Estimates the distress slope inside each gender × exercise subgroup, holding the group fixed by stratification.</a:t>
+            </a:r>
+            <a:endParaRPr lang="en-US" sz="1100" dirty="0"/>
+          </a:p>
+        </p:txBody>
+      </p:sp>
+      <p:sp>
+        <p:nvSpPr>
+          <p:cNvPr id="33" name="Shape 25">
+            <a:extLst>
+              <a:ext uri="{FF2B5EF4-FFF2-40B4-BE49-F238E27FC236}">
+                <a16:creationId xmlns:a16="http://schemas.microsoft.com/office/drawing/2014/main" id="{6D53F180-309E-49DE-FF40-BE2467614465}"/>
+              </a:ext>
+            </a:extLst>
+          </p:cNvPr>
+          <p:cNvSpPr/>
+          <p:nvPr/>
+        </p:nvSpPr>
+        <p:spPr>
+          <a:xfrm>
+            <a:off x="6709664" y="3493008"/>
+            <a:ext cx="5381244" cy="1993392"/>
           </a:xfrm>
           <a:prstGeom prst="roundRect">
             <a:avLst>
-              <a:gd name="adj" fmla="val 4667"/>
+              <a:gd name="adj" fmla="val 3670"/>
             </a:avLst>
           </a:prstGeom>
           <a:solidFill>
-            <a:srgbClr val="F1F4FA"/>
+            <a:srgbClr val="FFFFFF"/>
           </a:solidFill>
           <a:ln w="12700">
             <a:solidFill>
@@ -13600,6 +13544,13 @@
             </a:solidFill>
             <a:prstDash val="solid"/>
           </a:ln>
+          <a:effectLst>
+            <a:outerShdw blurRad="101600" dist="25400" dir="5400000" algn="bl" rotWithShape="0">
+              <a:srgbClr val="9AA8C8">
+                <a:alpha val="22000"/>
+              </a:srgbClr>
+            </a:outerShdw>
+          </a:effectLst>
         </p:spPr>
         <p:txBody>
           <a:bodyPr/>
@@ -13611,103 +13562,26 @@
       </p:sp>
       <p:sp>
         <p:nvSpPr>
-          <p:cNvPr id="15" name="Text 11"/>
-          <p:cNvSpPr/>
-          <p:nvPr/>
-        </p:nvSpPr>
-        <p:spPr>
-          <a:xfrm>
-            <a:off x="4931664" y="4663440"/>
-            <a:ext cx="1633728" cy="457200"/>
-          </a:xfrm>
-          <a:prstGeom prst="rect">
-            <a:avLst/>
-          </a:prstGeom>
-          <a:noFill/>
-          <a:ln/>
-        </p:spPr>
-        <p:txBody>
-          <a:bodyPr wrap="square" lIns="0" tIns="0" rIns="0" bIns="0" rtlCol="0" anchor="ctr"/>
-          <a:lstStyle/>
-          <a:p>
-            <a:pPr marL="0" indent="0" algn="l">
-              <a:buNone/>
-            </a:pPr>
-            <a:r>
-              <a:rPr lang="en-US" sz="1800" b="1" dirty="0">
-                <a:solidFill>
-                  <a:srgbClr val="23305A"/>
-                </a:solidFill>
-                <a:latin typeface="Cambria" pitchFamily="34" charset="0"/>
-                <a:ea typeface="Cambria" pitchFamily="34" charset="-122"/>
-                <a:cs typeface="Cambria" pitchFamily="34" charset="-120"/>
-              </a:rPr>
-              <a:t>≈ 0</a:t>
-            </a:r>
-            <a:endParaRPr lang="en-US" sz="1800" dirty="0"/>
-          </a:p>
-        </p:txBody>
-      </p:sp>
-      <p:sp>
-        <p:nvSpPr>
-          <p:cNvPr id="16" name="Text 12"/>
-          <p:cNvSpPr/>
-          <p:nvPr/>
-        </p:nvSpPr>
-        <p:spPr>
-          <a:xfrm>
-            <a:off x="4931664" y="5102352"/>
-            <a:ext cx="1652016" cy="731520"/>
-          </a:xfrm>
-          <a:prstGeom prst="rect">
-            <a:avLst/>
-          </a:prstGeom>
-          <a:noFill/>
-          <a:ln/>
-        </p:spPr>
-        <p:txBody>
-          <a:bodyPr wrap="square" lIns="0" tIns="0" rIns="0" bIns="0" rtlCol="0" anchor="t"/>
-          <a:lstStyle/>
-          <a:p>
-            <a:pPr marL="0" indent="0">
-              <a:lnSpc>
-                <a:spcPct val="100000"/>
-              </a:lnSpc>
-              <a:buNone/>
-            </a:pPr>
-            <a:r>
-              <a:rPr lang="en-US" sz="1000" dirty="0">
-                <a:solidFill>
-                  <a:srgbClr val="2C3247"/>
-                </a:solidFill>
-                <a:latin typeface="Calibri" pitchFamily="34" charset="0"/>
-                <a:ea typeface="Calibri" pitchFamily="34" charset="-122"/>
-                <a:cs typeface="Calibri" pitchFamily="34" charset="-120"/>
-              </a:rPr>
-              <a:t>loneliness slope within groups</a:t>
-            </a:r>
-            <a:endParaRPr lang="en-US" sz="1000" dirty="0"/>
-          </a:p>
-        </p:txBody>
-      </p:sp>
-      <p:sp>
-        <p:nvSpPr>
-          <p:cNvPr id="17" name="Shape 13"/>
-          <p:cNvSpPr/>
-          <p:nvPr/>
-        </p:nvSpPr>
-        <p:spPr>
-          <a:xfrm>
-            <a:off x="7077456" y="1371600"/>
-            <a:ext cx="4544568" cy="1737360"/>
-          </a:xfrm>
-          <a:prstGeom prst="roundRect">
-            <a:avLst>
-              <a:gd name="adj" fmla="val 4211"/>
-            </a:avLst>
+          <p:cNvPr id="34" name="Shape 26">
+            <a:extLst>
+              <a:ext uri="{FF2B5EF4-FFF2-40B4-BE49-F238E27FC236}">
+                <a16:creationId xmlns:a16="http://schemas.microsoft.com/office/drawing/2014/main" id="{349B8A11-D5D3-A122-AC7E-8800DF9E3568}"/>
+              </a:ext>
+            </a:extLst>
+          </p:cNvPr>
+          <p:cNvSpPr/>
+          <p:nvPr/>
+        </p:nvSpPr>
+        <p:spPr>
+          <a:xfrm>
+            <a:off x="6965696" y="3749040"/>
+            <a:ext cx="548640" cy="548640"/>
+          </a:xfrm>
+          <a:prstGeom prst="ellipse">
+            <a:avLst/>
           </a:prstGeom>
           <a:solidFill>
-            <a:srgbClr val="131A33"/>
+            <a:srgbClr val="2E8B83"/>
           </a:solidFill>
           <a:ln/>
           <a:effectLst>
@@ -13728,20 +13602,118 @@
       </p:sp>
       <p:sp>
         <p:nvSpPr>
-          <p:cNvPr id="18" name="Shape 14"/>
-          <p:cNvSpPr/>
-          <p:nvPr/>
-        </p:nvSpPr>
-        <p:spPr>
-          <a:xfrm>
-            <a:off x="7351776" y="1591056"/>
-            <a:ext cx="457200" cy="457200"/>
-          </a:xfrm>
-          <a:prstGeom prst="ellipse">
-            <a:avLst/>
+          <p:cNvPr id="35" name="Text 27">
+            <a:extLst>
+              <a:ext uri="{FF2B5EF4-FFF2-40B4-BE49-F238E27FC236}">
+                <a16:creationId xmlns:a16="http://schemas.microsoft.com/office/drawing/2014/main" id="{D49E9254-7101-A331-2144-7D606E31AC0E}"/>
+              </a:ext>
+            </a:extLst>
+          </p:cNvPr>
+          <p:cNvSpPr/>
+          <p:nvPr/>
+        </p:nvSpPr>
+        <p:spPr>
+          <a:xfrm>
+            <a:off x="6965696" y="3749040"/>
+            <a:ext cx="548640" cy="548640"/>
+          </a:xfrm>
+          <a:prstGeom prst="rect">
+            <a:avLst/>
+          </a:prstGeom>
+          <a:noFill/>
+          <a:ln/>
+        </p:spPr>
+        <p:txBody>
+          <a:bodyPr wrap="square" lIns="0" tIns="0" rIns="0" bIns="0" rtlCol="0" anchor="ctr"/>
+          <a:lstStyle/>
+          <a:p>
+            <a:pPr marL="0" indent="0" algn="ctr">
+              <a:buNone/>
+            </a:pPr>
+            <a:r>
+              <a:rPr lang="en-US" sz="2000" b="1" dirty="0">
+                <a:solidFill>
+                  <a:srgbClr val="FFFFFF"/>
+                </a:solidFill>
+                <a:latin typeface="Cambria" pitchFamily="34" charset="0"/>
+                <a:ea typeface="Cambria" pitchFamily="34" charset="-122"/>
+                <a:cs typeface="Cambria" pitchFamily="34" charset="-120"/>
+              </a:rPr>
+              <a:t>**</a:t>
+            </a:r>
+            <a:endParaRPr lang="en-US" sz="2000" dirty="0"/>
+          </a:p>
+        </p:txBody>
+      </p:sp>
+      <p:sp>
+        <p:nvSpPr>
+          <p:cNvPr id="36" name="Text 28">
+            <a:extLst>
+              <a:ext uri="{FF2B5EF4-FFF2-40B4-BE49-F238E27FC236}">
+                <a16:creationId xmlns:a16="http://schemas.microsoft.com/office/drawing/2014/main" id="{3D212012-33FA-AB64-ECC1-E741FCDA15D2}"/>
+              </a:ext>
+            </a:extLst>
+          </p:cNvPr>
+          <p:cNvSpPr/>
+          <p:nvPr/>
+        </p:nvSpPr>
+        <p:spPr>
+          <a:xfrm>
+            <a:off x="7660640" y="3749040"/>
+            <a:ext cx="4192524" cy="566928"/>
+          </a:xfrm>
+          <a:prstGeom prst="rect">
+            <a:avLst/>
+          </a:prstGeom>
+          <a:noFill/>
+          <a:ln/>
+        </p:spPr>
+        <p:txBody>
+          <a:bodyPr wrap="square" lIns="0" tIns="0" rIns="0" bIns="0" rtlCol="0" anchor="ctr"/>
+          <a:lstStyle/>
+          <a:p>
+            <a:pPr marL="0" indent="0">
+              <a:buNone/>
+            </a:pPr>
+            <a:r>
+              <a:rPr lang="en-US" sz="1450" b="1" dirty="0">
+                <a:solidFill>
+                  <a:srgbClr val="23305A"/>
+                </a:solidFill>
+                <a:latin typeface="Calibri" pitchFamily="34" charset="0"/>
+                <a:ea typeface="Calibri" pitchFamily="34" charset="-122"/>
+                <a:cs typeface="Calibri" pitchFamily="34" charset="-120"/>
+              </a:rPr>
+              <a:t>Logistic forecast of P(addicted)</a:t>
+            </a:r>
+            <a:endParaRPr lang="en-US" sz="1450" dirty="0"/>
+          </a:p>
+        </p:txBody>
+      </p:sp>
+      <p:sp>
+        <p:nvSpPr>
+          <p:cNvPr id="37" name="Shape 29">
+            <a:extLst>
+              <a:ext uri="{FF2B5EF4-FFF2-40B4-BE49-F238E27FC236}">
+                <a16:creationId xmlns:a16="http://schemas.microsoft.com/office/drawing/2014/main" id="{80CA69BE-5513-8955-8E96-4C4B5DFD436D}"/>
+              </a:ext>
+            </a:extLst>
+          </p:cNvPr>
+          <p:cNvSpPr/>
+          <p:nvPr/>
+        </p:nvSpPr>
+        <p:spPr>
+          <a:xfrm>
+            <a:off x="6983984" y="4389120"/>
+            <a:ext cx="4832604" cy="384048"/>
+          </a:xfrm>
+          <a:prstGeom prst="roundRect">
+            <a:avLst>
+              <a:gd name="adj" fmla="val 11905"/>
+            </a:avLst>
           </a:prstGeom>
           <a:solidFill>
-            <a:srgbClr val="2A3358"/>
+            <a:srgbClr val="E3F1EF"/>
           </a:solidFill>
           <a:ln/>
         </p:spPr>
@@ -13753,40 +13725,22 @@
           </a:p>
         </p:txBody>
       </p:sp>
-      <p:pic>
-        <p:nvPicPr>
-          <p:cNvPr id="19" name="Image 2" descr="preencoded.png"/>
-          <p:cNvPicPr>
-            <a:picLocks noChangeAspect="1"/>
-          </p:cNvPicPr>
-          <p:nvPr/>
-        </p:nvPicPr>
-        <p:blipFill>
-          <a:blip r:embed="rId5"/>
-          <a:stretch>
-            <a:fillRect/>
-          </a:stretch>
-        </p:blipFill>
-        <p:spPr>
-          <a:xfrm>
-            <a:off x="7479792" y="1719072"/>
-            <a:ext cx="201168" cy="201168"/>
-          </a:xfrm>
-          <a:prstGeom prst="rect">
-            <a:avLst/>
-          </a:prstGeom>
-        </p:spPr>
-      </p:pic>
-      <p:sp>
-        <p:nvSpPr>
-          <p:cNvPr id="20" name="Text 15"/>
-          <p:cNvSpPr/>
-          <p:nvPr/>
-        </p:nvSpPr>
-        <p:spPr>
-          <a:xfrm>
-            <a:off x="7955280" y="1572768"/>
-            <a:ext cx="3447288" cy="274320"/>
+      <p:sp>
+        <p:nvSpPr>
+          <p:cNvPr id="38" name="Text 30">
+            <a:extLst>
+              <a:ext uri="{FF2B5EF4-FFF2-40B4-BE49-F238E27FC236}">
+                <a16:creationId xmlns:a16="http://schemas.microsoft.com/office/drawing/2014/main" id="{10FBC451-66BB-6F0B-32F4-7310BD7E4EA3}"/>
+              </a:ext>
+            </a:extLst>
+          </p:cNvPr>
+          <p:cNvSpPr/>
+          <p:nvPr/>
+        </p:nvSpPr>
+        <p:spPr>
+          <a:xfrm>
+            <a:off x="7112000" y="4389120"/>
+            <a:ext cx="4631436" cy="384048"/>
           </a:xfrm>
           <a:prstGeom prst="rect">
             <a:avLst/>
@@ -13802,80 +13756,36 @@
               <a:buNone/>
             </a:pPr>
             <a:r>
-              <a:rPr lang="en-US" sz="1100" b="1" kern="0" spc="100" dirty="0">
-                <a:solidFill>
-                  <a:srgbClr val="AFC2E8"/>
-                </a:solidFill>
-                <a:latin typeface="Calibri" pitchFamily="34" charset="0"/>
-                <a:ea typeface="Calibri" pitchFamily="34" charset="-122"/>
-                <a:cs typeface="Calibri" pitchFamily="34" charset="-120"/>
-              </a:rPr>
-              <a:t>DO THE SLOPES DIFFER ACROSS GROUPS?</a:t>
-            </a:r>
-            <a:endParaRPr lang="en-US" sz="1100" dirty="0"/>
-          </a:p>
-        </p:txBody>
-      </p:sp>
-      <p:sp>
-        <p:nvSpPr>
-          <p:cNvPr id="21" name="Text 16"/>
-          <p:cNvSpPr/>
-          <p:nvPr/>
-        </p:nvSpPr>
-        <p:spPr>
-          <a:xfrm>
-            <a:off x="7955280" y="1865376"/>
-            <a:ext cx="3447288" cy="329184"/>
-          </a:xfrm>
-          <a:prstGeom prst="rect">
-            <a:avLst/>
-          </a:prstGeom>
-          <a:noFill/>
-          <a:ln/>
-        </p:spPr>
-        <p:txBody>
-          <a:bodyPr wrap="square" lIns="0" tIns="0" rIns="0" bIns="0" rtlCol="0" anchor="ctr"/>
-          <a:lstStyle/>
-          <a:p>
-            <a:pPr marL="0" indent="0">
-              <a:buNone/>
-            </a:pPr>
-            <a:r>
-              <a:rPr lang="en-US" sz="1400" b="1" dirty="0">
-                <a:solidFill>
-                  <a:srgbClr val="DA5740"/>
-                </a:solidFill>
-                <a:latin typeface="Calibri" pitchFamily="34" charset="0"/>
-                <a:ea typeface="Calibri" pitchFamily="34" charset="-122"/>
-                <a:cs typeface="Calibri" pitchFamily="34" charset="-120"/>
-              </a:rPr>
-              <a:t>No. </a:t>
-            </a:r>
-            <a:r>
-              <a:rPr lang="en-US" sz="1400" b="1" dirty="0">
-                <a:solidFill>
-                  <a:srgbClr val="FFFFFF"/>
-                </a:solidFill>
-                <a:latin typeface="Calibri" pitchFamily="34" charset="0"/>
-                <a:ea typeface="Calibri" pitchFamily="34" charset="-122"/>
-                <a:cs typeface="Calibri" pitchFamily="34" charset="-120"/>
-              </a:rPr>
-              <a:t>Interaction F(6, 805) = 0.65, p = 0.69.</a:t>
-            </a:r>
-            <a:endParaRPr lang="en-US" sz="1400" dirty="0"/>
-          </a:p>
-        </p:txBody>
-      </p:sp>
-      <p:sp>
-        <p:nvSpPr>
-          <p:cNvPr id="22" name="Text 17"/>
-          <p:cNvSpPr/>
-          <p:nvPr/>
-        </p:nvSpPr>
-        <p:spPr>
-          <a:xfrm>
-            <a:off x="7388352" y="2286000"/>
-            <a:ext cx="3959352" cy="713232"/>
+              <a:rPr lang="en-US" sz="1020" dirty="0">
+                <a:solidFill>
+                  <a:srgbClr val="2E8B83"/>
+                </a:solidFill>
+                <a:latin typeface="Consolas" pitchFamily="34" charset="0"/>
+                <a:ea typeface="Consolas" pitchFamily="34" charset="-122"/>
+                <a:cs typeface="Consolas" pitchFamily="34" charset="-120"/>
+              </a:rPr>
+              <a:t>~ depression + loneliness + gender + exercise + age + bullied</a:t>
+            </a:r>
+            <a:endParaRPr lang="en-US" sz="1020" dirty="0"/>
+          </a:p>
+        </p:txBody>
+      </p:sp>
+      <p:sp>
+        <p:nvSpPr>
+          <p:cNvPr id="39" name="Text 31">
+            <a:extLst>
+              <a:ext uri="{FF2B5EF4-FFF2-40B4-BE49-F238E27FC236}">
+                <a16:creationId xmlns:a16="http://schemas.microsoft.com/office/drawing/2014/main" id="{E4721E80-C703-76E0-0444-341A29F36D26}"/>
+              </a:ext>
+            </a:extLst>
+          </p:cNvPr>
+          <p:cNvSpPr/>
+          <p:nvPr/>
+        </p:nvSpPr>
+        <p:spPr>
+          <a:xfrm>
+            <a:off x="6983984" y="4828032"/>
+            <a:ext cx="4850892" cy="585216"/>
           </a:xfrm>
           <a:prstGeom prst="rect">
             <a:avLst/>
@@ -13889,100 +13799,22 @@
           <a:p>
             <a:pPr marL="0" indent="0">
               <a:lnSpc>
-                <a:spcPct val="108000"/>
+                <a:spcPct val="105000"/>
               </a:lnSpc>
               <a:buNone/>
             </a:pPr>
             <a:r>
-              <a:rPr lang="en-US" sz="1150" dirty="0">
-                <a:solidFill>
-                  <a:srgbClr val="E4E9F4"/>
-                </a:solidFill>
-                <a:latin typeface="Calibri" pitchFamily="34" charset="0"/>
-                <a:ea typeface="Calibri" pitchFamily="34" charset="-122"/>
-                <a:cs typeface="Calibri" pitchFamily="34" charset="-120"/>
-              </a:rPr>
-              <a:t>Depression pushes addiction just as hard for non-exercising boys as for exercising girls. This contradicts H2 (exercise buffering).</a:t>
-            </a:r>
-            <a:endParaRPr lang="en-US" sz="1150" dirty="0"/>
-          </a:p>
-        </p:txBody>
-      </p:sp>
-      <p:sp>
-        <p:nvSpPr>
-          <p:cNvPr id="29" name="Text 23"/>
-          <p:cNvSpPr/>
-          <p:nvPr/>
-        </p:nvSpPr>
-        <p:spPr>
-          <a:xfrm>
-            <a:off x="566928" y="6455664"/>
-            <a:ext cx="8686800" cy="274320"/>
-          </a:xfrm>
-          <a:prstGeom prst="rect">
-            <a:avLst/>
-          </a:prstGeom>
-          <a:noFill/>
-          <a:ln/>
-        </p:spPr>
-        <p:txBody>
-          <a:bodyPr wrap="square" lIns="0" tIns="0" rIns="0" bIns="0" rtlCol="0" anchor="ctr"/>
-          <a:lstStyle/>
-          <a:p>
-            <a:pPr marL="0" indent="0" algn="l">
-              <a:buNone/>
-            </a:pPr>
-            <a:r>
-              <a:rPr lang="en-US" sz="850" dirty="0">
-                <a:solidFill>
-                  <a:srgbClr val="6C7488"/>
-                </a:solidFill>
-                <a:latin typeface="Calibri" pitchFamily="34" charset="0"/>
-                <a:ea typeface="Calibri" pitchFamily="34" charset="-122"/>
-                <a:cs typeface="Calibri" pitchFamily="34" charset="-120"/>
-              </a:rPr>
-              <a:t>Group 6  ·  CIS2601 - Internet Addiction across gender × Exercise groups</a:t>
-            </a:r>
-            <a:endParaRPr lang="en-US" sz="850" dirty="0"/>
-          </a:p>
-        </p:txBody>
-      </p:sp>
-      <p:sp>
-        <p:nvSpPr>
-          <p:cNvPr id="30" name="Text 24"/>
-          <p:cNvSpPr/>
-          <p:nvPr/>
-        </p:nvSpPr>
-        <p:spPr>
-          <a:xfrm>
-            <a:off x="10161727" y="6455664"/>
-            <a:ext cx="1463040" cy="274320"/>
-          </a:xfrm>
-          <a:prstGeom prst="rect">
-            <a:avLst/>
-          </a:prstGeom>
-          <a:noFill/>
-          <a:ln/>
-        </p:spPr>
-        <p:txBody>
-          <a:bodyPr wrap="square" lIns="0" tIns="0" rIns="0" bIns="0" rtlCol="0" anchor="ctr"/>
-          <a:lstStyle/>
-          <a:p>
-            <a:pPr marL="0" indent="0" algn="r">
-              <a:buNone/>
-            </a:pPr>
-            <a:r>
-              <a:rPr lang="en-US" sz="850" dirty="0">
-                <a:solidFill>
-                  <a:srgbClr val="6C7488"/>
-                </a:solidFill>
-                <a:latin typeface="Calibri" pitchFamily="34" charset="0"/>
-                <a:ea typeface="Calibri" pitchFamily="34" charset="-122"/>
-                <a:cs typeface="Calibri" pitchFamily="34" charset="-120"/>
-              </a:rPr>
-              <a:t>08  /  11</a:t>
-            </a:r>
-            <a:endParaRPr lang="en-US" sz="850" dirty="0"/>
+              <a:rPr lang="en-US" sz="1100" dirty="0">
+                <a:solidFill>
+                  <a:srgbClr val="2C3247"/>
+                </a:solidFill>
+                <a:latin typeface="Calibri" pitchFamily="34" charset="0"/>
+                <a:ea typeface="Calibri" pitchFamily="34" charset="-122"/>
+                <a:cs typeface="Calibri" pitchFamily="34" charset="-120"/>
+              </a:rPr>
+              <a:t>70/30 stratified split: fit on train, score on the held-out test. ROC / AUC + confusion matrix; odds ratios on the full sample.</a:t>
+            </a:r>
+            <a:endParaRPr lang="en-US" sz="1100" dirty="0"/>
           </a:p>
         </p:txBody>
       </p:sp>
@@ -14424,7 +14256,7 @@
         </p:nvSpPr>
         <p:spPr>
           <a:xfrm>
-            <a:off x="5522976" y="1371600"/>
+            <a:off x="5532120" y="1017016"/>
             <a:ext cx="6099048" cy="274320"/>
           </a:xfrm>
           <a:prstGeom prst="rect">
@@ -14463,7 +14295,7 @@
         </p:nvSpPr>
         <p:spPr>
           <a:xfrm>
-            <a:off x="5522976" y="1719072"/>
+            <a:off x="5532120" y="1364488"/>
             <a:ext cx="6099048" cy="475488"/>
           </a:xfrm>
           <a:prstGeom prst="roundRect">
@@ -14497,7 +14329,7 @@
         </p:nvSpPr>
         <p:spPr>
           <a:xfrm>
-            <a:off x="5742432" y="1719072"/>
+            <a:off x="5751576" y="1364488"/>
             <a:ext cx="3447288" cy="475488"/>
           </a:xfrm>
           <a:prstGeom prst="rect">
@@ -14522,7 +14354,7 @@
                 <a:ea typeface="Calibri" pitchFamily="34" charset="-122"/>
                 <a:cs typeface="Calibri" pitchFamily="34" charset="-120"/>
               </a:rPr>
-              <a:t>+1 PHQ-9 point (depression)</a:t>
+              <a:t>+1 PHQ-9 point (depression) -  main question </a:t>
             </a:r>
             <a:endParaRPr lang="en-US" sz="1180" dirty="0"/>
           </a:p>
@@ -14536,7 +14368,7 @@
         </p:nvSpPr>
         <p:spPr>
           <a:xfrm>
-            <a:off x="9107424" y="1719072"/>
+            <a:off x="9116568" y="1364488"/>
             <a:ext cx="1234440" cy="475488"/>
           </a:xfrm>
           <a:prstGeom prst="rect">
@@ -14575,7 +14407,7 @@
         </p:nvSpPr>
         <p:spPr>
           <a:xfrm>
-            <a:off x="10250424" y="1719072"/>
+            <a:off x="10259568" y="1364488"/>
             <a:ext cx="1188720" cy="475488"/>
           </a:xfrm>
           <a:prstGeom prst="rect">
@@ -15476,7 +15308,7 @@
                 <a:ea typeface="Calibri" pitchFamily="34" charset="-122"/>
                 <a:cs typeface="Calibri" pitchFamily="34" charset="-120"/>
               </a:rPr>
-              <a:t>Group 6  ·  CIS2601 - Internet Addiction across gender × Exercise groups</a:t>
+              <a:t>Group 2  ·  CIS2601 - Internet Addiction across gender × Exercise groups</a:t>
             </a:r>
             <a:endParaRPr lang="en-US" sz="850" dirty="0"/>
           </a:p>
@@ -15484,40 +15316,46 @@
       </p:sp>
       <p:sp>
         <p:nvSpPr>
-          <p:cNvPr id="40" name="Text 36"/>
-          <p:cNvSpPr/>
-          <p:nvPr/>
-        </p:nvSpPr>
-        <p:spPr>
-          <a:xfrm>
-            <a:off x="10161727" y="6455664"/>
-            <a:ext cx="1463040" cy="274320"/>
-          </a:xfrm>
-          <a:prstGeom prst="rect">
-            <a:avLst/>
-          </a:prstGeom>
-          <a:noFill/>
-          <a:ln/>
-        </p:spPr>
-        <p:txBody>
-          <a:bodyPr wrap="square" lIns="0" tIns="0" rIns="0" bIns="0" rtlCol="0" anchor="ctr"/>
-          <a:lstStyle/>
-          <a:p>
-            <a:pPr marL="0" indent="0" algn="r">
-              <a:buNone/>
-            </a:pPr>
-            <a:r>
-              <a:rPr lang="en-US" sz="850" dirty="0">
-                <a:solidFill>
-                  <a:srgbClr val="6C7488"/>
-                </a:solidFill>
-                <a:latin typeface="Calibri" pitchFamily="34" charset="0"/>
-                <a:ea typeface="Calibri" pitchFamily="34" charset="-122"/>
-                <a:cs typeface="Calibri" pitchFamily="34" charset="-120"/>
-              </a:rPr>
-              <a:t>09  /  11</a:t>
-            </a:r>
-            <a:endParaRPr lang="en-US" sz="850" dirty="0"/>
+          <p:cNvPr id="41" name="TextBox 40">
+            <a:extLst>
+              <a:ext uri="{FF2B5EF4-FFF2-40B4-BE49-F238E27FC236}">
+                <a16:creationId xmlns:a16="http://schemas.microsoft.com/office/drawing/2014/main" id="{5430D645-0B8A-B69F-F936-4E074DD23EEF}"/>
+              </a:ext>
+            </a:extLst>
+          </p:cNvPr>
+          <p:cNvSpPr txBox="1"/>
+          <p:nvPr/>
+        </p:nvSpPr>
+        <p:spPr>
+          <a:xfrm>
+            <a:off x="5522976" y="1919269"/>
+            <a:ext cx="3317240" cy="276999"/>
+          </a:xfrm>
+          <a:prstGeom prst="rect">
+            <a:avLst/>
+          </a:prstGeom>
+          <a:noFill/>
+        </p:spPr>
+        <p:txBody>
+          <a:bodyPr wrap="square" rtlCol="0">
+            <a:spAutoFit/>
+          </a:bodyPr>
+          <a:lstStyle/>
+          <a:p>
+            <a:r>
+              <a:rPr lang="en-US" sz="1200" b="1" dirty="0">
+                <a:latin typeface="Calibri" panose="020F0502020204030204" pitchFamily="34" charset="0"/>
+                <a:cs typeface="Calibri" panose="020F0502020204030204" pitchFamily="34" charset="0"/>
+              </a:rPr>
+              <a:t>A</a:t>
+            </a:r>
+            <a:r>
+              <a:rPr lang="en-IL" sz="1200" b="1" dirty="0">
+                <a:latin typeface="Calibri" panose="020F0502020204030204" pitchFamily="34" charset="0"/>
+                <a:cs typeface="Calibri" panose="020F0502020204030204" pitchFamily="34" charset="0"/>
+              </a:rPr>
+              <a:t>sossiated variables that helped main question</a:t>
+            </a:r>
           </a:p>
         </p:txBody>
       </p:sp>

--- a/Slides.pptx
+++ b/Slides.pptx
@@ -10621,7 +10621,7 @@
                 <a:ea typeface="Calibri" pitchFamily="34" charset="-122"/>
                 <a:cs typeface="Calibri" pitchFamily="34" charset="-120"/>
               </a:rPr>
-              <a:t>Controls &amp; exclusions</a:t>
+              <a:t>Confounded Variables</a:t>
             </a:r>
             <a:endParaRPr lang="en-US" sz="1200" dirty="0"/>
           </a:p>
@@ -10635,7 +10635,7 @@
         </p:nvSpPr>
         <p:spPr>
           <a:xfrm>
-            <a:off x="804672" y="5065776"/>
+            <a:off x="859536" y="5071872"/>
             <a:ext cx="3044952" cy="777240"/>
           </a:xfrm>
           <a:prstGeom prst="rect">
@@ -10648,11 +10648,10 @@
           <a:bodyPr wrap="square" lIns="0" tIns="0" rIns="0" bIns="0" rtlCol="0" anchor="t"/>
           <a:lstStyle/>
           <a:p>
-            <a:pPr marL="0" indent="0">
+            <a:pPr lvl="1">
               <a:lnSpc>
                 <a:spcPct val="105000"/>
               </a:lnSpc>
-              <a:buNone/>
             </a:pPr>
             <a:r>
               <a:rPr lang="en-US" sz="1100" dirty="0">
@@ -10663,7 +10662,25 @@
                 <a:ea typeface="Calibri" pitchFamily="34" charset="-122"/>
                 <a:cs typeface="Calibri" pitchFamily="34" charset="-120"/>
               </a:rPr>
-              <a:t>Controls: age + bullied. </a:t>
+              <a:t>Age</a:t>
+            </a:r>
+          </a:p>
+          <a:p>
+            <a:pPr lvl="1">
+              <a:lnSpc>
+                <a:spcPct val="105000"/>
+              </a:lnSpc>
+            </a:pPr>
+            <a:r>
+              <a:rPr lang="en-US" sz="1100" dirty="0">
+                <a:solidFill>
+                  <a:srgbClr val="2C3247"/>
+                </a:solidFill>
+                <a:latin typeface="Calibri" pitchFamily="34" charset="0"/>
+                <a:ea typeface="Calibri" pitchFamily="34" charset="-122"/>
+                <a:cs typeface="Calibri" pitchFamily="34" charset="-120"/>
+              </a:rPr>
+              <a:t>Bullied </a:t>
             </a:r>
             <a:endParaRPr lang="en-US" sz="1100" dirty="0"/>
           </a:p>
@@ -13133,7 +13150,7 @@
                 <a:ea typeface="Calibri" pitchFamily="34" charset="-122"/>
                 <a:cs typeface="Calibri" pitchFamily="34" charset="-120"/>
               </a:rPr>
-              <a:t>Depression pushes addiction just as hard for non-exercising boys as for exercising girls. This contradicts H2 (exercise buffering).</a:t>
+              <a:t>Depression is associated with addiction just as hard for non-exercising boys as for exercising girls. This contradicts H2 (exercise buffering).</a:t>
             </a:r>
             <a:endParaRPr lang="en-US" sz="1150" dirty="0"/>
           </a:p>
@@ -15258,7 +15275,7 @@
                 <a:ea typeface="Calibri" pitchFamily="34" charset="-122"/>
                 <a:cs typeface="Calibri" pitchFamily="34" charset="-120"/>
               </a:rPr>
-              <a:t>Each extra PHQ-9 point raises the odds of addiction by ~18%. </a:t>
+              <a:t>Each extra PHQ-9 point is associated with the odds of addiction by ~18%. </a:t>
             </a:r>
             <a:r>
               <a:rPr lang="en-US" sz="1130" dirty="0">
@@ -15347,14 +15364,14 @@
                 <a:latin typeface="Calibri" panose="020F0502020204030204" pitchFamily="34" charset="0"/>
                 <a:cs typeface="Calibri" panose="020F0502020204030204" pitchFamily="34" charset="0"/>
               </a:rPr>
-              <a:t>A</a:t>
+              <a:t>Associated</a:t>
             </a:r>
             <a:r>
               <a:rPr lang="en-IL" sz="1200" b="1" dirty="0">
                 <a:latin typeface="Calibri" panose="020F0502020204030204" pitchFamily="34" charset="0"/>
                 <a:cs typeface="Calibri" panose="020F0502020204030204" pitchFamily="34" charset="0"/>
               </a:rPr>
-              <a:t>sossiated variables that helped main question</a:t>
+              <a:t> variables that helped main question</a:t>
             </a:r>
           </a:p>
         </p:txBody>
